--- a/open-source-summit-na-2026/Artifacts-Metadata-OSS-NA26.pptx
+++ b/open-source-summit-na-2026/Artifacts-Metadata-OSS-NA26.pptx
@@ -5,30 +5,38 @@
     <p:sldMasterId id="2147483648" r:id="rId1"/>
   </p:sldMasterIdLst>
   <p:notesMasterIdLst>
-    <p:notesMasterId r:id="rId9"/>
+    <p:notesMasterId r:id="rId10"/>
   </p:notesMasterIdLst>
   <p:sldIdLst>
     <p:sldId id="256" r:id="rId2"/>
     <p:sldId id="259" r:id="rId3"/>
     <p:sldId id="260" r:id="rId4"/>
-    <p:sldId id="265" r:id="rId5"/>
-    <p:sldId id="270" r:id="rId6"/>
-    <p:sldId id="271" r:id="rId7"/>
-    <p:sldId id="272" r:id="rId8"/>
+    <p:sldId id="274" r:id="rId5"/>
+    <p:sldId id="275" r:id="rId6"/>
+    <p:sldId id="270" r:id="rId7"/>
+    <p:sldId id="271" r:id="rId8"/>
+    <p:sldId id="272" r:id="rId9"/>
   </p:sldIdLst>
   <p:sldSz cx="9144000" cy="5143500" type="screen16x9"/>
   <p:notesSz cx="6858000" cy="9144000"/>
   <p:embeddedFontLst>
     <p:embeddedFont>
+      <p:font typeface="Open Sans" panose="020B0606030504020204" pitchFamily="34" charset="0"/>
+      <p:regular r:id="rId11"/>
+      <p:bold r:id="rId12"/>
+      <p:italic r:id="rId13"/>
+      <p:boldItalic r:id="rId14"/>
+    </p:embeddedFont>
+    <p:embeddedFont>
       <p:font typeface="Open Sans ExtraBold" panose="020B0906030804020204" pitchFamily="34" charset="0"/>
-      <p:bold r:id="rId10"/>
-      <p:italic r:id="rId11"/>
-      <p:boldItalic r:id="rId12"/>
+      <p:bold r:id="rId15"/>
+      <p:italic r:id="rId16"/>
+      <p:boldItalic r:id="rId17"/>
     </p:embeddedFont>
     <p:embeddedFont>
       <p:font typeface="Roboto Slab" pitchFamily="2" charset="0"/>
-      <p:regular r:id="rId13"/>
-      <p:bold r:id="rId14"/>
+      <p:regular r:id="rId18"/>
+      <p:bold r:id="rId19"/>
     </p:embeddedFont>
   </p:embeddedFontLst>
   <p:defaultTextStyle>
@@ -276,7 +284,7 @@
       </p15:sldGuideLst>
     </p:ext>
     <p:ext uri="GoogleSlidesCustomDataVersion2">
-      <go:slidesCustomData xmlns:go="http://customooxmlschemas.google.com/" xmlns:ahyp="http://schemas.microsoft.com/office/drawing/2018/hyperlinkcolor" xmlns:p15="http://schemas.microsoft.com/office/powerpoint/2012/main" xmlns:p14="http://schemas.microsoft.com/office/powerpoint/2010/main" xmlns:com="http://schemas.openxmlformats.org/drawingml/2006/compatibility" xmlns:pvml="urn:schemas-microsoft-com:office:powerpoint" xmlns:v="urn:schemas-microsoft-com:vml" xmlns:o="urn:schemas-microsoft-com:office:office" xmlns:dgm="http://schemas.openxmlformats.org/drawingml/2006/diagram" xmlns:c="http://schemas.openxmlformats.org/drawingml/2006/chart" xmlns:mv="urn:schemas-microsoft-com:mac:vml" xmlns:mc="http://schemas.openxmlformats.org/markup-compatibility/2006" xmlns="" r:id="rId26" roundtripDataSignature="AMtx7mj3Hae6wHXSg8RjajXw+gvxoBjCNA=="/>
+      <go:slidesCustomData xmlns="" xmlns:mc="http://schemas.openxmlformats.org/markup-compatibility/2006" xmlns:mv="urn:schemas-microsoft-com:mac:vml" xmlns:c="http://schemas.openxmlformats.org/drawingml/2006/chart" xmlns:dgm="http://schemas.openxmlformats.org/drawingml/2006/diagram" xmlns:o="urn:schemas-microsoft-com:office:office" xmlns:v="urn:schemas-microsoft-com:vml" xmlns:pvml="urn:schemas-microsoft-com:office:powerpoint" xmlns:com="http://schemas.openxmlformats.org/drawingml/2006/compatibility" xmlns:p14="http://schemas.microsoft.com/office/powerpoint/2010/main" xmlns:p15="http://schemas.microsoft.com/office/powerpoint/2012/main" xmlns:ahyp="http://schemas.microsoft.com/office/drawing/2018/hyperlinkcolor" xmlns:go="http://customooxmlschemas.google.com/" r:id="rId26" roundtripDataSignature="AMtx7mj3Hae6wHXSg8RjajXw+gvxoBjCNA=="/>
     </p:ext>
   </p:extLst>
 </p:presentation>
@@ -287,6 +295,7 @@
   <p1510:revLst>
     <p1510:client id="{34686B4B-12BF-4429-AD80-52C8FB04EB9B}" v="269" dt="2026-05-15T17:59:15.776"/>
     <p1510:client id="{4A15327D-F9BC-489D-B322-FE0EE08B6F02}" v="315" dt="2026-05-14T23:46:41.652"/>
+    <p1510:client id="{90E5CBF4-278A-41CE-A417-0B27A25D703E}" v="1076" dt="2026-05-16T21:31:23.706"/>
   </p1510:revLst>
 </p1510:revInfo>
 </file>
@@ -346,73 +355,6 @@
           </ac:spMkLst>
         </pc:spChg>
       </pc:sldChg>
-      <pc:sldChg chg="modSp del">
-        <pc:chgData name="SOCHEAT SOU" userId="h9r6aE/HMXtYi+C3P0fl9Bv7wbMcEIkJZrqDxo3i6YE=" providerId="None" clId="Web-{4A15327D-F9BC-489D-B322-FE0EE08B6F02}" dt="2026-05-14T23:29:45.781" v="161"/>
-        <pc:sldMkLst>
-          <pc:docMk/>
-          <pc:sldMk cId="2544791661" sldId="261"/>
-        </pc:sldMkLst>
-        <pc:spChg chg="mod">
-          <ac:chgData name="SOCHEAT SOU" userId="h9r6aE/HMXtYi+C3P0fl9Bv7wbMcEIkJZrqDxo3i6YE=" providerId="None" clId="Web-{4A15327D-F9BC-489D-B322-FE0EE08B6F02}" dt="2026-05-14T23:26:39.814" v="85" actId="20577"/>
-          <ac:spMkLst>
-            <pc:docMk/>
-            <pc:sldMk cId="2544791661" sldId="261"/>
-            <ac:spMk id="55" creationId="{37EB1CBB-D92E-0327-CCDC-F91CDC434E52}"/>
-          </ac:spMkLst>
-        </pc:spChg>
-      </pc:sldChg>
-      <pc:sldChg chg="modSp add del ord">
-        <pc:chgData name="SOCHEAT SOU" userId="h9r6aE/HMXtYi+C3P0fl9Bv7wbMcEIkJZrqDxo3i6YE=" providerId="None" clId="Web-{4A15327D-F9BC-489D-B322-FE0EE08B6F02}" dt="2026-05-14T23:33:28.232" v="217"/>
-        <pc:sldMkLst>
-          <pc:docMk/>
-          <pc:sldMk cId="3267736174" sldId="263"/>
-        </pc:sldMkLst>
-        <pc:spChg chg="mod">
-          <ac:chgData name="SOCHEAT SOU" userId="h9r6aE/HMXtYi+C3P0fl9Bv7wbMcEIkJZrqDxo3i6YE=" providerId="None" clId="Web-{4A15327D-F9BC-489D-B322-FE0EE08B6F02}" dt="2026-05-14T23:29:43.500" v="160" actId="20577"/>
-          <ac:spMkLst>
-            <pc:docMk/>
-            <pc:sldMk cId="3267736174" sldId="263"/>
-            <ac:spMk id="55" creationId="{BBA3EDF7-D4D7-5425-379B-290118F53567}"/>
-          </ac:spMkLst>
-        </pc:spChg>
-      </pc:sldChg>
-      <pc:sldChg chg="modSp">
-        <pc:chgData name="SOCHEAT SOU" userId="h9r6aE/HMXtYi+C3P0fl9Bv7wbMcEIkJZrqDxo3i6YE=" providerId="None" clId="Web-{4A15327D-F9BC-489D-B322-FE0EE08B6F02}" dt="2026-05-14T23:45:15.121" v="312" actId="20577"/>
-        <pc:sldMkLst>
-          <pc:docMk/>
-          <pc:sldMk cId="683496415" sldId="265"/>
-        </pc:sldMkLst>
-        <pc:spChg chg="mod">
-          <ac:chgData name="SOCHEAT SOU" userId="h9r6aE/HMXtYi+C3P0fl9Bv7wbMcEIkJZrqDxo3i6YE=" providerId="None" clId="Web-{4A15327D-F9BC-489D-B322-FE0EE08B6F02}" dt="2026-05-14T23:34:12.950" v="219" actId="20577"/>
-          <ac:spMkLst>
-            <pc:docMk/>
-            <pc:sldMk cId="683496415" sldId="265"/>
-            <ac:spMk id="54" creationId="{71588D80-3FA8-1DEC-312F-2E626C95C312}"/>
-          </ac:spMkLst>
-        </pc:spChg>
-        <pc:spChg chg="mod">
-          <ac:chgData name="SOCHEAT SOU" userId="h9r6aE/HMXtYi+C3P0fl9Bv7wbMcEIkJZrqDxo3i6YE=" providerId="None" clId="Web-{4A15327D-F9BC-489D-B322-FE0EE08B6F02}" dt="2026-05-14T23:45:15.121" v="312" actId="20577"/>
-          <ac:spMkLst>
-            <pc:docMk/>
-            <pc:sldMk cId="683496415" sldId="265"/>
-            <ac:spMk id="55" creationId="{B3431829-4278-F70B-1D0C-9EE954C02483}"/>
-          </ac:spMkLst>
-        </pc:spChg>
-      </pc:sldChg>
-      <pc:sldChg chg="del">
-        <pc:chgData name="SOCHEAT SOU" userId="h9r6aE/HMXtYi+C3P0fl9Bv7wbMcEIkJZrqDxo3i6YE=" providerId="None" clId="Web-{4A15327D-F9BC-489D-B322-FE0EE08B6F02}" dt="2026-05-14T23:45:20.262" v="313"/>
-        <pc:sldMkLst>
-          <pc:docMk/>
-          <pc:sldMk cId="2362794320" sldId="266"/>
-        </pc:sldMkLst>
-      </pc:sldChg>
-      <pc:sldChg chg="del">
-        <pc:chgData name="SOCHEAT SOU" userId="h9r6aE/HMXtYi+C3P0fl9Bv7wbMcEIkJZrqDxo3i6YE=" providerId="None" clId="Web-{4A15327D-F9BC-489D-B322-FE0EE08B6F02}" dt="2026-05-14T23:33:28.232" v="216"/>
-        <pc:sldMkLst>
-          <pc:docMk/>
-          <pc:sldMk cId="827888407" sldId="268"/>
-        </pc:sldMkLst>
-      </pc:sldChg>
       <pc:sldChg chg="delSp modSp">
         <pc:chgData name="SOCHEAT SOU" userId="h9r6aE/HMXtYi+C3P0fl9Bv7wbMcEIkJZrqDxo3i6YE=" providerId="None" clId="Web-{4A15327D-F9BC-489D-B322-FE0EE08B6F02}" dt="2026-05-14T23:46:40.386" v="315" actId="20577"/>
         <pc:sldMkLst>
@@ -425,14 +367,6 @@
             <pc:docMk/>
             <pc:sldMk cId="1924054245" sldId="272"/>
             <ac:spMk id="37" creationId="{2B6969A5-4370-A028-952D-7C93CF593C91}"/>
-          </ac:spMkLst>
-        </pc:spChg>
-        <pc:spChg chg="del">
-          <ac:chgData name="SOCHEAT SOU" userId="h9r6aE/HMXtYi+C3P0fl9Bv7wbMcEIkJZrqDxo3i6YE=" providerId="None" clId="Web-{4A15327D-F9BC-489D-B322-FE0EE08B6F02}" dt="2026-05-14T23:46:37.042" v="314"/>
-          <ac:spMkLst>
-            <pc:docMk/>
-            <pc:sldMk cId="1924054245" sldId="272"/>
-            <ac:spMk id="38" creationId="{C1631F1B-9523-0C8D-FC70-0AA9E0FFAD2E}"/>
           </ac:spMkLst>
         </pc:spChg>
       </pc:sldChg>
@@ -501,6 +435,293 @@
             <pc:docMk/>
             <pc:sldMk cId="3470802326" sldId="270"/>
             <ac:spMk id="55" creationId="{3E6FAAB9-D890-94D0-B2BF-AAA49CFEFE25}"/>
+          </ac:spMkLst>
+        </pc:spChg>
+      </pc:sldChg>
+    </pc:docChg>
+  </pc:docChgLst>
+  <pc:docChgLst>
+    <pc:chgData name="SOCHEAT SOU" userId="h9r6aE/HMXtYi+C3P0fl9Bv7wbMcEIkJZrqDxo3i6YE=" providerId="None" clId="Web-{90E5CBF4-278A-41CE-A417-0B27A25D703E}"/>
+    <pc:docChg chg="addSld delSld modSld sldOrd">
+      <pc:chgData name="SOCHEAT SOU" userId="h9r6aE/HMXtYi+C3P0fl9Bv7wbMcEIkJZrqDxo3i6YE=" providerId="None" clId="Web-{90E5CBF4-278A-41CE-A417-0B27A25D703E}" dt="2026-05-16T21:30:26.456" v="1051"/>
+      <pc:docMkLst>
+        <pc:docMk/>
+      </pc:docMkLst>
+      <pc:sldChg chg="addSp modSp">
+        <pc:chgData name="SOCHEAT SOU" userId="h9r6aE/HMXtYi+C3P0fl9Bv7wbMcEIkJZrqDxo3i6YE=" providerId="None" clId="Web-{90E5CBF4-278A-41CE-A417-0B27A25D703E}" dt="2026-05-16T20:19:48.620" v="4" actId="1076"/>
+        <pc:sldMkLst>
+          <pc:docMk/>
+          <pc:sldMk cId="0" sldId="256"/>
+        </pc:sldMkLst>
+        <pc:picChg chg="add mod">
+          <ac:chgData name="SOCHEAT SOU" userId="h9r6aE/HMXtYi+C3P0fl9Bv7wbMcEIkJZrqDxo3i6YE=" providerId="None" clId="Web-{90E5CBF4-278A-41CE-A417-0B27A25D703E}" dt="2026-05-16T20:19:48.620" v="4" actId="1076"/>
+          <ac:picMkLst>
+            <pc:docMk/>
+            <pc:sldMk cId="0" sldId="256"/>
+            <ac:picMk id="2" creationId="{F453C14A-628E-8662-6743-274960D3CEB6}"/>
+          </ac:picMkLst>
+        </pc:picChg>
+      </pc:sldChg>
+      <pc:sldChg chg="addSp">
+        <pc:chgData name="SOCHEAT SOU" userId="h9r6aE/HMXtYi+C3P0fl9Bv7wbMcEIkJZrqDxo3i6YE=" providerId="None" clId="Web-{90E5CBF4-278A-41CE-A417-0B27A25D703E}" dt="2026-05-16T20:20:20.604" v="11"/>
+        <pc:sldMkLst>
+          <pc:docMk/>
+          <pc:sldMk cId="0" sldId="259"/>
+        </pc:sldMkLst>
+        <pc:picChg chg="add">
+          <ac:chgData name="SOCHEAT SOU" userId="h9r6aE/HMXtYi+C3P0fl9Bv7wbMcEIkJZrqDxo3i6YE=" providerId="None" clId="Web-{90E5CBF4-278A-41CE-A417-0B27A25D703E}" dt="2026-05-16T20:20:20.604" v="11"/>
+          <ac:picMkLst>
+            <pc:docMk/>
+            <pc:sldMk cId="0" sldId="259"/>
+            <ac:picMk id="3" creationId="{33C0644E-0C1A-B156-6ACC-90ABF4CD0915}"/>
+          </ac:picMkLst>
+        </pc:picChg>
+      </pc:sldChg>
+      <pc:sldChg chg="addSp delSp modSp">
+        <pc:chgData name="SOCHEAT SOU" userId="h9r6aE/HMXtYi+C3P0fl9Bv7wbMcEIkJZrqDxo3i6YE=" providerId="None" clId="Web-{90E5CBF4-278A-41CE-A417-0B27A25D703E}" dt="2026-05-16T21:28:07.487" v="980" actId="20577"/>
+        <pc:sldMkLst>
+          <pc:docMk/>
+          <pc:sldMk cId="0" sldId="260"/>
+        </pc:sldMkLst>
+        <pc:spChg chg="mod">
+          <ac:chgData name="SOCHEAT SOU" userId="h9r6aE/HMXtYi+C3P0fl9Bv7wbMcEIkJZrqDxo3i6YE=" providerId="None" clId="Web-{90E5CBF4-278A-41CE-A417-0B27A25D703E}" dt="2026-05-16T21:28:07.487" v="980" actId="20577"/>
+          <ac:spMkLst>
+            <pc:docMk/>
+            <pc:sldMk cId="0" sldId="260"/>
+            <ac:spMk id="61" creationId="{00000000-0000-0000-0000-000000000000}"/>
+          </ac:spMkLst>
+        </pc:spChg>
+        <pc:spChg chg="mod">
+          <ac:chgData name="SOCHEAT SOU" userId="h9r6aE/HMXtYi+C3P0fl9Bv7wbMcEIkJZrqDxo3i6YE=" providerId="None" clId="Web-{90E5CBF4-278A-41CE-A417-0B27A25D703E}" dt="2026-05-16T21:06:53.768" v="695" actId="20577"/>
+          <ac:spMkLst>
+            <pc:docMk/>
+            <pc:sldMk cId="0" sldId="260"/>
+            <ac:spMk id="62" creationId="{00000000-0000-0000-0000-000000000000}"/>
+          </ac:spMkLst>
+        </pc:spChg>
+        <pc:graphicFrameChg chg="add del mod">
+          <ac:chgData name="SOCHEAT SOU" userId="h9r6aE/HMXtYi+C3P0fl9Bv7wbMcEIkJZrqDxo3i6YE=" providerId="None" clId="Web-{90E5CBF4-278A-41CE-A417-0B27A25D703E}" dt="2026-05-16T20:50:33.674" v="150"/>
+          <ac:graphicFrameMkLst>
+            <pc:docMk/>
+            <pc:sldMk cId="0" sldId="260"/>
+            <ac:graphicFrameMk id="5" creationId="{7CDA45CD-0BBD-9024-0499-9AA0C553BD8E}"/>
+          </ac:graphicFrameMkLst>
+        </pc:graphicFrameChg>
+        <pc:picChg chg="add">
+          <ac:chgData name="SOCHEAT SOU" userId="h9r6aE/HMXtYi+C3P0fl9Bv7wbMcEIkJZrqDxo3i6YE=" providerId="None" clId="Web-{90E5CBF4-278A-41CE-A417-0B27A25D703E}" dt="2026-05-16T20:20:18.917" v="10"/>
+          <ac:picMkLst>
+            <pc:docMk/>
+            <pc:sldMk cId="0" sldId="260"/>
+            <ac:picMk id="3" creationId="{5CB14F7C-E463-1928-F311-67C2A197BFF2}"/>
+          </ac:picMkLst>
+        </pc:picChg>
+      </pc:sldChg>
+      <pc:sldChg chg="addSp modSp del">
+        <pc:chgData name="SOCHEAT SOU" userId="h9r6aE/HMXtYi+C3P0fl9Bv7wbMcEIkJZrqDxo3i6YE=" providerId="None" clId="Web-{90E5CBF4-278A-41CE-A417-0B27A25D703E}" dt="2026-05-16T21:07:34.737" v="696"/>
+        <pc:sldMkLst>
+          <pc:docMk/>
+          <pc:sldMk cId="683496415" sldId="265"/>
+        </pc:sldMkLst>
+        <pc:spChg chg="mod">
+          <ac:chgData name="SOCHEAT SOU" userId="h9r6aE/HMXtYi+C3P0fl9Bv7wbMcEIkJZrqDxo3i6YE=" providerId="None" clId="Web-{90E5CBF4-278A-41CE-A417-0B27A25D703E}" dt="2026-05-16T20:28:37.450" v="148" actId="20577"/>
+          <ac:spMkLst>
+            <pc:docMk/>
+            <pc:sldMk cId="683496415" sldId="265"/>
+            <ac:spMk id="55" creationId="{B3431829-4278-F70B-1D0C-9EE954C02483}"/>
+          </ac:spMkLst>
+        </pc:spChg>
+        <pc:picChg chg="add">
+          <ac:chgData name="SOCHEAT SOU" userId="h9r6aE/HMXtYi+C3P0fl9Bv7wbMcEIkJZrqDxo3i6YE=" providerId="None" clId="Web-{90E5CBF4-278A-41CE-A417-0B27A25D703E}" dt="2026-05-16T20:20:16.604" v="9"/>
+          <ac:picMkLst>
+            <pc:docMk/>
+            <pc:sldMk cId="683496415" sldId="265"/>
+            <ac:picMk id="3" creationId="{BCCE95A0-7399-A070-3CEE-EB00DA2812C8}"/>
+          </ac:picMkLst>
+        </pc:picChg>
+      </pc:sldChg>
+      <pc:sldChg chg="addSp">
+        <pc:chgData name="SOCHEAT SOU" userId="h9r6aE/HMXtYi+C3P0fl9Bv7wbMcEIkJZrqDxo3i6YE=" providerId="None" clId="Web-{90E5CBF4-278A-41CE-A417-0B27A25D703E}" dt="2026-05-16T20:20:14.839" v="8"/>
+        <pc:sldMkLst>
+          <pc:docMk/>
+          <pc:sldMk cId="3470802326" sldId="270"/>
+        </pc:sldMkLst>
+        <pc:picChg chg="add">
+          <ac:chgData name="SOCHEAT SOU" userId="h9r6aE/HMXtYi+C3P0fl9Bv7wbMcEIkJZrqDxo3i6YE=" providerId="None" clId="Web-{90E5CBF4-278A-41CE-A417-0B27A25D703E}" dt="2026-05-16T20:20:14.839" v="8"/>
+          <ac:picMkLst>
+            <pc:docMk/>
+            <pc:sldMk cId="3470802326" sldId="270"/>
+            <ac:picMk id="3" creationId="{B5B11B99-46FB-6538-2C3A-A3A9675C5595}"/>
+          </ac:picMkLst>
+        </pc:picChg>
+      </pc:sldChg>
+      <pc:sldChg chg="addSp modSp">
+        <pc:chgData name="SOCHEAT SOU" userId="h9r6aE/HMXtYi+C3P0fl9Bv7wbMcEIkJZrqDxo3i6YE=" providerId="None" clId="Web-{90E5CBF4-278A-41CE-A417-0B27A25D703E}" dt="2026-05-16T21:18:51.415" v="941" actId="20577"/>
+        <pc:sldMkLst>
+          <pc:docMk/>
+          <pc:sldMk cId="1248693181" sldId="271"/>
+        </pc:sldMkLst>
+        <pc:spChg chg="mod">
+          <ac:chgData name="SOCHEAT SOU" userId="h9r6aE/HMXtYi+C3P0fl9Bv7wbMcEIkJZrqDxo3i6YE=" providerId="None" clId="Web-{90E5CBF4-278A-41CE-A417-0B27A25D703E}" dt="2026-05-16T21:18:51.415" v="941" actId="20577"/>
+          <ac:spMkLst>
+            <pc:docMk/>
+            <pc:sldMk cId="1248693181" sldId="271"/>
+            <ac:spMk id="55" creationId="{E1D22FC8-BA11-955B-E264-B53D3FAAE6E4}"/>
+          </ac:spMkLst>
+        </pc:spChg>
+        <pc:picChg chg="add mod">
+          <ac:chgData name="SOCHEAT SOU" userId="h9r6aE/HMXtYi+C3P0fl9Bv7wbMcEIkJZrqDxo3i6YE=" providerId="None" clId="Web-{90E5CBF4-278A-41CE-A417-0B27A25D703E}" dt="2026-05-16T20:20:10.182" v="7" actId="1076"/>
+          <ac:picMkLst>
+            <pc:docMk/>
+            <pc:sldMk cId="1248693181" sldId="271"/>
+            <ac:picMk id="3" creationId="{DDE6AA8D-A575-4574-03B6-9A447FD29FA2}"/>
+          </ac:picMkLst>
+        </pc:picChg>
+      </pc:sldChg>
+      <pc:sldChg chg="addSp">
+        <pc:chgData name="SOCHEAT SOU" userId="h9r6aE/HMXtYi+C3P0fl9Bv7wbMcEIkJZrqDxo3i6YE=" providerId="None" clId="Web-{90E5CBF4-278A-41CE-A417-0B27A25D703E}" dt="2026-05-16T20:19:58.057" v="5"/>
+        <pc:sldMkLst>
+          <pc:docMk/>
+          <pc:sldMk cId="1924054245" sldId="272"/>
+        </pc:sldMkLst>
+        <pc:picChg chg="add">
+          <ac:chgData name="SOCHEAT SOU" userId="h9r6aE/HMXtYi+C3P0fl9Bv7wbMcEIkJZrqDxo3i6YE=" providerId="None" clId="Web-{90E5CBF4-278A-41CE-A417-0B27A25D703E}" dt="2026-05-16T20:19:58.057" v="5"/>
+          <ac:picMkLst>
+            <pc:docMk/>
+            <pc:sldMk cId="1924054245" sldId="272"/>
+            <ac:picMk id="3" creationId="{BD87C00F-F191-7D40-AF85-A7543AD164B4}"/>
+          </ac:picMkLst>
+        </pc:picChg>
+      </pc:sldChg>
+      <pc:sldChg chg="modSp add del replId">
+        <pc:chgData name="SOCHEAT SOU" userId="h9r6aE/HMXtYi+C3P0fl9Bv7wbMcEIkJZrqDxo3i6YE=" providerId="None" clId="Web-{90E5CBF4-278A-41CE-A417-0B27A25D703E}" dt="2026-05-16T20:24:11.809" v="58"/>
+        <pc:sldMkLst>
+          <pc:docMk/>
+          <pc:sldMk cId="4112606684" sldId="273"/>
+        </pc:sldMkLst>
+        <pc:spChg chg="mod">
+          <ac:chgData name="SOCHEAT SOU" userId="h9r6aE/HMXtYi+C3P0fl9Bv7wbMcEIkJZrqDxo3i6YE=" providerId="None" clId="Web-{90E5CBF4-278A-41CE-A417-0B27A25D703E}" dt="2026-05-16T20:22:21.199" v="16" actId="20577"/>
+          <ac:spMkLst>
+            <pc:docMk/>
+            <pc:sldMk cId="4112606684" sldId="273"/>
+            <ac:spMk id="55" creationId="{D60A90B2-4960-B8AA-D8F1-A5E2A2BC3275}"/>
+          </ac:spMkLst>
+        </pc:spChg>
+      </pc:sldChg>
+      <pc:sldChg chg="addSp delSp modSp add ord replId">
+        <pc:chgData name="SOCHEAT SOU" userId="h9r6aE/HMXtYi+C3P0fl9Bv7wbMcEIkJZrqDxo3i6YE=" providerId="None" clId="Web-{90E5CBF4-278A-41CE-A417-0B27A25D703E}" dt="2026-05-16T21:30:26.456" v="1051"/>
+        <pc:sldMkLst>
+          <pc:docMk/>
+          <pc:sldMk cId="2848597407" sldId="274"/>
+        </pc:sldMkLst>
+        <pc:spChg chg="add del mod">
+          <ac:chgData name="SOCHEAT SOU" userId="h9r6aE/HMXtYi+C3P0fl9Bv7wbMcEIkJZrqDxo3i6YE=" providerId="None" clId="Web-{90E5CBF4-278A-41CE-A417-0B27A25D703E}" dt="2026-05-16T20:51:25.268" v="158"/>
+          <ac:spMkLst>
+            <pc:docMk/>
+            <pc:sldMk cId="2848597407" sldId="274"/>
+            <ac:spMk id="4" creationId="{4F9FDB1A-FA64-0663-0A96-7A64F63571CB}"/>
+          </ac:spMkLst>
+        </pc:spChg>
+        <pc:spChg chg="add del">
+          <ac:chgData name="SOCHEAT SOU" userId="h9r6aE/HMXtYi+C3P0fl9Bv7wbMcEIkJZrqDxo3i6YE=" providerId="None" clId="Web-{90E5CBF4-278A-41CE-A417-0B27A25D703E}" dt="2026-05-16T21:10:19.158" v="716"/>
+          <ac:spMkLst>
+            <pc:docMk/>
+            <pc:sldMk cId="2848597407" sldId="274"/>
+            <ac:spMk id="8" creationId="{06891FCD-38F1-E76C-3D31-2C4657FDC0A2}"/>
+          </ac:spMkLst>
+        </pc:spChg>
+        <pc:spChg chg="add mod">
+          <ac:chgData name="SOCHEAT SOU" userId="h9r6aE/HMXtYi+C3P0fl9Bv7wbMcEIkJZrqDxo3i6YE=" providerId="None" clId="Web-{90E5CBF4-278A-41CE-A417-0B27A25D703E}" dt="2026-05-16T21:11:19.361" v="726" actId="20577"/>
+          <ac:spMkLst>
+            <pc:docMk/>
+            <pc:sldMk cId="2848597407" sldId="274"/>
+            <ac:spMk id="10" creationId="{C1B53E73-897D-099E-D45D-0F885A98462C}"/>
+          </ac:spMkLst>
+        </pc:spChg>
+        <pc:spChg chg="add del mod">
+          <ac:chgData name="SOCHEAT SOU" userId="h9r6aE/HMXtYi+C3P0fl9Bv7wbMcEIkJZrqDxo3i6YE=" providerId="None" clId="Web-{90E5CBF4-278A-41CE-A417-0B27A25D703E}" dt="2026-05-16T21:10:42.877" v="720"/>
+          <ac:spMkLst>
+            <pc:docMk/>
+            <pc:sldMk cId="2848597407" sldId="274"/>
+            <ac:spMk id="12" creationId="{6C861035-34F1-040E-1696-47EC03E3BD42}"/>
+          </ac:spMkLst>
+        </pc:spChg>
+        <pc:spChg chg="add del mod">
+          <ac:chgData name="SOCHEAT SOU" userId="h9r6aE/HMXtYi+C3P0fl9Bv7wbMcEIkJZrqDxo3i6YE=" providerId="None" clId="Web-{90E5CBF4-278A-41CE-A417-0B27A25D703E}" dt="2026-05-16T21:11:25.768" v="728"/>
+          <ac:spMkLst>
+            <pc:docMk/>
+            <pc:sldMk cId="2848597407" sldId="274"/>
+            <ac:spMk id="14" creationId="{0508F229-7A48-494C-44A2-24259B184A55}"/>
+          </ac:spMkLst>
+        </pc:spChg>
+        <pc:spChg chg="mod">
+          <ac:chgData name="SOCHEAT SOU" userId="h9r6aE/HMXtYi+C3P0fl9Bv7wbMcEIkJZrqDxo3i6YE=" providerId="None" clId="Web-{90E5CBF4-278A-41CE-A417-0B27A25D703E}" dt="2026-05-16T20:50:54.268" v="154" actId="20577"/>
+          <ac:spMkLst>
+            <pc:docMk/>
+            <pc:sldMk cId="2848597407" sldId="274"/>
+            <ac:spMk id="60" creationId="{F959A41D-DC41-CBAC-1C5E-FB10282D3AA3}"/>
+          </ac:spMkLst>
+        </pc:spChg>
+        <pc:spChg chg="add del mod ord">
+          <ac:chgData name="SOCHEAT SOU" userId="h9r6aE/HMXtYi+C3P0fl9Bv7wbMcEIkJZrqDxo3i6YE=" providerId="None" clId="Web-{90E5CBF4-278A-41CE-A417-0B27A25D703E}" dt="2026-05-16T21:11:20.565" v="727"/>
+          <ac:spMkLst>
+            <pc:docMk/>
+            <pc:sldMk cId="2848597407" sldId="274"/>
+            <ac:spMk id="61" creationId="{4CBB9CCD-2FAD-572F-A6E8-8FF527C4B6B7}"/>
+          </ac:spMkLst>
+        </pc:spChg>
+        <pc:spChg chg="del mod">
+          <ac:chgData name="SOCHEAT SOU" userId="h9r6aE/HMXtYi+C3P0fl9Bv7wbMcEIkJZrqDxo3i6YE=" providerId="None" clId="Web-{90E5CBF4-278A-41CE-A417-0B27A25D703E}" dt="2026-05-16T20:51:14.080" v="157"/>
+          <ac:spMkLst>
+            <pc:docMk/>
+            <pc:sldMk cId="2848597407" sldId="274"/>
+            <ac:spMk id="62" creationId="{F743197A-0518-84B5-34F4-F5ED3C19A1E7}"/>
+          </ac:spMkLst>
+        </pc:spChg>
+        <pc:graphicFrameChg chg="add mod modGraphic">
+          <ac:chgData name="SOCHEAT SOU" userId="h9r6aE/HMXtYi+C3P0fl9Bv7wbMcEIkJZrqDxo3i6YE=" providerId="None" clId="Web-{90E5CBF4-278A-41CE-A417-0B27A25D703E}" dt="2026-05-16T21:30:26.456" v="1051"/>
+          <ac:graphicFrameMkLst>
+            <pc:docMk/>
+            <pc:sldMk cId="2848597407" sldId="274"/>
+            <ac:graphicFrameMk id="6" creationId="{134B1712-8080-3B12-84F6-4AB35C9747AD}"/>
+          </ac:graphicFrameMkLst>
+        </pc:graphicFrameChg>
+      </pc:sldChg>
+      <pc:sldChg chg="addSp delSp modSp add replId">
+        <pc:chgData name="SOCHEAT SOU" userId="h9r6aE/HMXtYi+C3P0fl9Bv7wbMcEIkJZrqDxo3i6YE=" providerId="None" clId="Web-{90E5CBF4-278A-41CE-A417-0B27A25D703E}" dt="2026-05-16T21:14:06.644" v="743" actId="20577"/>
+        <pc:sldMkLst>
+          <pc:docMk/>
+          <pc:sldMk cId="1650872000" sldId="275"/>
+        </pc:sldMkLst>
+        <pc:spChg chg="add del mod">
+          <ac:chgData name="SOCHEAT SOU" userId="h9r6aE/HMXtYi+C3P0fl9Bv7wbMcEIkJZrqDxo3i6YE=" providerId="None" clId="Web-{90E5CBF4-278A-41CE-A417-0B27A25D703E}" dt="2026-05-16T21:08:48.112" v="713"/>
+          <ac:spMkLst>
+            <pc:docMk/>
+            <pc:sldMk cId="1650872000" sldId="275"/>
+            <ac:spMk id="4" creationId="{15E8B0F5-5EA3-28A2-A709-0ADEFB133C16}"/>
+          </ac:spMkLst>
+        </pc:spChg>
+        <pc:spChg chg="add">
+          <ac:chgData name="SOCHEAT SOU" userId="h9r6aE/HMXtYi+C3P0fl9Bv7wbMcEIkJZrqDxo3i6YE=" providerId="None" clId="Web-{90E5CBF4-278A-41CE-A417-0B27A25D703E}" dt="2026-05-16T21:08:44.705" v="712"/>
+          <ac:spMkLst>
+            <pc:docMk/>
+            <pc:sldMk cId="1650872000" sldId="275"/>
+            <ac:spMk id="6" creationId="{F9CE0D61-48EC-BCC9-E751-C99DE9DCDFF4}"/>
+          </ac:spMkLst>
+        </pc:spChg>
+        <pc:spChg chg="mod">
+          <ac:chgData name="SOCHEAT SOU" userId="h9r6aE/HMXtYi+C3P0fl9Bv7wbMcEIkJZrqDxo3i6YE=" providerId="None" clId="Web-{90E5CBF4-278A-41CE-A417-0B27A25D703E}" dt="2026-05-16T21:14:06.644" v="743" actId="20577"/>
+          <ac:spMkLst>
+            <pc:docMk/>
+            <pc:sldMk cId="1650872000" sldId="275"/>
+            <ac:spMk id="61" creationId="{9CD4349F-D645-5D5F-4120-F396A9C75F0D}"/>
+          </ac:spMkLst>
+        </pc:spChg>
+        <pc:spChg chg="del mod">
+          <ac:chgData name="SOCHEAT SOU" userId="h9r6aE/HMXtYi+C3P0fl9Bv7wbMcEIkJZrqDxo3i6YE=" providerId="None" clId="Web-{90E5CBF4-278A-41CE-A417-0B27A25D703E}" dt="2026-05-16T21:08:39.205" v="711"/>
+          <ac:spMkLst>
+            <pc:docMk/>
+            <pc:sldMk cId="1650872000" sldId="275"/>
+            <ac:spMk id="62" creationId="{7D2CF529-96B1-8373-6728-D4B0C862F7E0}"/>
           </ac:spMkLst>
         </pc:spChg>
       </pc:sldChg>
@@ -1459,10 +1680,10 @@
   <p:cSld>
     <p:spTree>
       <p:nvGrpSpPr>
-        <p:cNvPr id="1" name="Shape 50">
+        <p:cNvPr id="1" name="Shape 56">
           <a:extLst>
             <a:ext uri="{FF2B5EF4-FFF2-40B4-BE49-F238E27FC236}">
-              <a16:creationId xmlns:a16="http://schemas.microsoft.com/office/drawing/2014/main" id="{7F350E88-B03F-30D3-13F8-80B6064E683D}"/>
+              <a16:creationId xmlns:a16="http://schemas.microsoft.com/office/drawing/2014/main" id="{C4425219-8EC0-EAE0-BDFF-A2FF036791E1}"/>
             </a:ext>
           </a:extLst>
         </p:cNvPr>
@@ -1479,10 +1700,10 @@
       </p:grpSpPr>
       <p:sp>
         <p:nvSpPr>
-          <p:cNvPr id="51" name="Google Shape;51;g31b75ad4c98_0_0:notes">
+          <p:cNvPr id="57" name="Google Shape;57;p4:notes">
             <a:extLst>
               <a:ext uri="{FF2B5EF4-FFF2-40B4-BE49-F238E27FC236}">
-                <a16:creationId xmlns:a16="http://schemas.microsoft.com/office/drawing/2014/main" id="{2E1C0522-2A78-94CF-DF23-12C57EE69D59}"/>
+                <a16:creationId xmlns:a16="http://schemas.microsoft.com/office/drawing/2014/main" id="{36D00550-8D68-549B-50DE-5933C8CA0FA3}"/>
               </a:ext>
             </a:extLst>
           </p:cNvPr>
@@ -1536,10 +1757,10 @@
       </p:sp>
       <p:sp>
         <p:nvSpPr>
-          <p:cNvPr id="52" name="Google Shape;52;g31b75ad4c98_0_0:notes">
+          <p:cNvPr id="58" name="Google Shape;58;p4:notes">
             <a:extLst>
               <a:ext uri="{FF2B5EF4-FFF2-40B4-BE49-F238E27FC236}">
-                <a16:creationId xmlns:a16="http://schemas.microsoft.com/office/drawing/2014/main" id="{76476610-9AD7-8CEF-1BE2-8A86CDEBBE94}"/>
+                <a16:creationId xmlns:a16="http://schemas.microsoft.com/office/drawing/2014/main" id="{2705DF7A-B77A-AA0F-3E2B-2AB805E031E7}"/>
               </a:ext>
             </a:extLst>
           </p:cNvPr>
@@ -1589,7 +1810,7 @@
     </p:spTree>
     <p:extLst>
       <p:ext uri="{BB962C8B-B14F-4D97-AF65-F5344CB8AC3E}">
-        <p14:creationId xmlns:p14="http://schemas.microsoft.com/office/powerpoint/2010/main" val="89703915"/>
+        <p14:creationId xmlns:p14="http://schemas.microsoft.com/office/powerpoint/2010/main" val="684276292"/>
       </p:ext>
     </p:extLst>
   </p:cSld>
@@ -1600,6 +1821,151 @@
 </file>
 
 <file path=ppt/notesSlides/notesSlide5.xml><?xml version="1.0" encoding="utf-8"?>
+<p:notes xmlns:a="http://schemas.openxmlformats.org/drawingml/2006/main" xmlns:r="http://schemas.openxmlformats.org/officeDocument/2006/relationships" xmlns:p="http://schemas.openxmlformats.org/presentationml/2006/main" showMasterSp="0" showMasterPhAnim="0">
+  <p:cSld>
+    <p:spTree>
+      <p:nvGrpSpPr>
+        <p:cNvPr id="1" name="Shape 56">
+          <a:extLst>
+            <a:ext uri="{FF2B5EF4-FFF2-40B4-BE49-F238E27FC236}">
+              <a16:creationId xmlns:a16="http://schemas.microsoft.com/office/drawing/2014/main" id="{6EB74269-AD4C-93E4-7098-9489D671F59A}"/>
+            </a:ext>
+          </a:extLst>
+        </p:cNvPr>
+        <p:cNvGrpSpPr/>
+        <p:nvPr/>
+      </p:nvGrpSpPr>
+      <p:grpSpPr>
+        <a:xfrm>
+          <a:off x="0" y="0"/>
+          <a:ext cx="0" cy="0"/>
+          <a:chOff x="0" y="0"/>
+          <a:chExt cx="0" cy="0"/>
+        </a:xfrm>
+      </p:grpSpPr>
+      <p:sp>
+        <p:nvSpPr>
+          <p:cNvPr id="57" name="Google Shape;57;p4:notes">
+            <a:extLst>
+              <a:ext uri="{FF2B5EF4-FFF2-40B4-BE49-F238E27FC236}">
+                <a16:creationId xmlns:a16="http://schemas.microsoft.com/office/drawing/2014/main" id="{C0D986C1-E495-1271-3BA9-E4CB3491C214}"/>
+              </a:ext>
+            </a:extLst>
+          </p:cNvPr>
+          <p:cNvSpPr>
+            <a:spLocks noGrp="1" noRot="1" noChangeAspect="1"/>
+          </p:cNvSpPr>
+          <p:nvPr>
+            <p:ph type="sldImg" idx="2"/>
+          </p:nvPr>
+        </p:nvSpPr>
+        <p:spPr>
+          <a:xfrm>
+            <a:off x="381000" y="685800"/>
+            <a:ext cx="6096000" cy="3429000"/>
+          </a:xfrm>
+          <a:custGeom>
+            <a:avLst/>
+            <a:gdLst/>
+            <a:ahLst/>
+            <a:cxnLst/>
+            <a:rect l="l" t="t" r="r" b="b"/>
+            <a:pathLst>
+              <a:path w="120000" h="120000" extrusionOk="0">
+                <a:moveTo>
+                  <a:pt x="0" y="0"/>
+                </a:moveTo>
+                <a:lnTo>
+                  <a:pt x="120000" y="0"/>
+                </a:lnTo>
+                <a:lnTo>
+                  <a:pt x="120000" y="120000"/>
+                </a:lnTo>
+                <a:lnTo>
+                  <a:pt x="0" y="120000"/>
+                </a:lnTo>
+                <a:close/>
+              </a:path>
+            </a:pathLst>
+          </a:custGeom>
+          <a:noFill/>
+          <a:ln w="9525" cap="flat" cmpd="sng">
+            <a:solidFill>
+              <a:srgbClr val="000000"/>
+            </a:solidFill>
+            <a:prstDash val="solid"/>
+            <a:round/>
+            <a:headEnd type="none" w="sm" len="sm"/>
+            <a:tailEnd type="none" w="sm" len="sm"/>
+          </a:ln>
+        </p:spPr>
+      </p:sp>
+      <p:sp>
+        <p:nvSpPr>
+          <p:cNvPr id="58" name="Google Shape;58;p4:notes">
+            <a:extLst>
+              <a:ext uri="{FF2B5EF4-FFF2-40B4-BE49-F238E27FC236}">
+                <a16:creationId xmlns:a16="http://schemas.microsoft.com/office/drawing/2014/main" id="{098FCAD8-EEF4-F685-A8FC-52DC0F910A72}"/>
+              </a:ext>
+            </a:extLst>
+          </p:cNvPr>
+          <p:cNvSpPr txBox="1">
+            <a:spLocks noGrp="1"/>
+          </p:cNvSpPr>
+          <p:nvPr>
+            <p:ph type="body" idx="1"/>
+          </p:nvPr>
+        </p:nvSpPr>
+        <p:spPr>
+          <a:xfrm>
+            <a:off x="685800" y="4343400"/>
+            <a:ext cx="5486400" cy="4114800"/>
+          </a:xfrm>
+          <a:prstGeom prst="rect">
+            <a:avLst/>
+          </a:prstGeom>
+          <a:noFill/>
+          <a:ln>
+            <a:noFill/>
+          </a:ln>
+        </p:spPr>
+        <p:txBody>
+          <a:bodyPr spcFirstLastPara="1" wrap="square" lIns="91425" tIns="91425" rIns="91425" bIns="91425" anchor="t" anchorCtr="0">
+            <a:noAutofit/>
+          </a:bodyPr>
+          <a:lstStyle/>
+          <a:p>
+            <a:pPr marL="0" lvl="0" indent="0" algn="l" rtl="0">
+              <a:lnSpc>
+                <a:spcPct val="100000"/>
+              </a:lnSpc>
+              <a:spcBef>
+                <a:spcPts val="0"/>
+              </a:spcBef>
+              <a:spcAft>
+                <a:spcPts val="0"/>
+              </a:spcAft>
+              <a:buSzPts val="1100"/>
+              <a:buNone/>
+            </a:pPr>
+            <a:endParaRPr/>
+          </a:p>
+        </p:txBody>
+      </p:sp>
+    </p:spTree>
+    <p:extLst>
+      <p:ext uri="{BB962C8B-B14F-4D97-AF65-F5344CB8AC3E}">
+        <p14:creationId xmlns:p14="http://schemas.microsoft.com/office/powerpoint/2010/main" val="3515605465"/>
+      </p:ext>
+    </p:extLst>
+  </p:cSld>
+  <p:clrMapOvr>
+    <a:masterClrMapping/>
+  </p:clrMapOvr>
+</p:notes>
+</file>
+
+<file path=ppt/notesSlides/notesSlide6.xml><?xml version="1.0" encoding="utf-8"?>
 <p:notes xmlns:a="http://schemas.openxmlformats.org/drawingml/2006/main" xmlns:r="http://schemas.openxmlformats.org/officeDocument/2006/relationships" xmlns:p="http://schemas.openxmlformats.org/presentationml/2006/main" showMasterSp="0" showMasterPhAnim="0">
   <p:cSld>
     <p:spTree>
@@ -1744,7 +2110,7 @@
 </p:notes>
 </file>
 
-<file path=ppt/notesSlides/notesSlide6.xml><?xml version="1.0" encoding="utf-8"?>
+<file path=ppt/notesSlides/notesSlide7.xml><?xml version="1.0" encoding="utf-8"?>
 <p:notes xmlns:a="http://schemas.openxmlformats.org/drawingml/2006/main" xmlns:r="http://schemas.openxmlformats.org/officeDocument/2006/relationships" xmlns:p="http://schemas.openxmlformats.org/presentationml/2006/main" showMasterSp="0" showMasterPhAnim="0">
   <p:cSld>
     <p:spTree>
@@ -1889,7 +2255,7 @@
 </p:notes>
 </file>
 
-<file path=ppt/notesSlides/notesSlide7.xml><?xml version="1.0" encoding="utf-8"?>
+<file path=ppt/notesSlides/notesSlide8.xml><?xml version="1.0" encoding="utf-8"?>
 <p:notes xmlns:a="http://schemas.openxmlformats.org/drawingml/2006/main" xmlns:r="http://schemas.openxmlformats.org/officeDocument/2006/relationships" xmlns:p="http://schemas.openxmlformats.org/presentationml/2006/main" showMasterSp="0" showMasterPhAnim="0">
   <p:cSld>
     <p:spTree>
@@ -6225,6 +6591,36 @@
           </a:p>
         </p:txBody>
       </p:sp>
+      <p:pic>
+        <p:nvPicPr>
+          <p:cNvPr id="2" name="Picture 1">
+            <a:extLst>
+              <a:ext uri="{FF2B5EF4-FFF2-40B4-BE49-F238E27FC236}">
+                <a16:creationId xmlns:a16="http://schemas.microsoft.com/office/drawing/2014/main" id="{F453C14A-628E-8662-6743-274960D3CEB6}"/>
+              </a:ext>
+            </a:extLst>
+          </p:cNvPr>
+          <p:cNvPicPr>
+            <a:picLocks noChangeAspect="1"/>
+          </p:cNvPicPr>
+          <p:nvPr/>
+        </p:nvPicPr>
+        <p:blipFill>
+          <a:blip r:embed="rId3"/>
+          <a:stretch>
+            <a:fillRect/>
+          </a:stretch>
+        </p:blipFill>
+        <p:spPr>
+          <a:xfrm>
+            <a:off x="312964" y="4520972"/>
+            <a:ext cx="540885" cy="540885"/>
+          </a:xfrm>
+          <a:prstGeom prst="rect">
+            <a:avLst/>
+          </a:prstGeom>
+        </p:spPr>
+      </p:pic>
     </p:spTree>
   </p:cSld>
   <p:clrMapOvr>
@@ -6408,6 +6804,36 @@
           </a:p>
         </p:txBody>
       </p:sp>
+      <p:pic>
+        <p:nvPicPr>
+          <p:cNvPr id="3" name="Picture 2">
+            <a:extLst>
+              <a:ext uri="{FF2B5EF4-FFF2-40B4-BE49-F238E27FC236}">
+                <a16:creationId xmlns:a16="http://schemas.microsoft.com/office/drawing/2014/main" id="{33C0644E-0C1A-B156-6ACC-90ABF4CD0915}"/>
+              </a:ext>
+            </a:extLst>
+          </p:cNvPr>
+          <p:cNvPicPr>
+            <a:picLocks noChangeAspect="1"/>
+          </p:cNvPicPr>
+          <p:nvPr/>
+        </p:nvPicPr>
+        <p:blipFill>
+          <a:blip r:embed="rId3"/>
+          <a:stretch>
+            <a:fillRect/>
+          </a:stretch>
+        </p:blipFill>
+        <p:spPr>
+          <a:xfrm>
+            <a:off x="8290152" y="4520972"/>
+            <a:ext cx="540885" cy="540885"/>
+          </a:xfrm>
+          <a:prstGeom prst="rect">
+            <a:avLst/>
+          </a:prstGeom>
+        </p:spPr>
+      </p:pic>
     </p:spTree>
   </p:cSld>
   <p:clrMapOvr>
@@ -6505,7 +6931,7 @@
             </a:pPr>
             <a:r>
               <a:rPr lang="en-US" sz="1600" dirty="0"/>
-              <a:t>Initial approaches worked but were cumbersome to non-DevOps teams</a:t>
+              <a:t>Early approaches worked but required DevOps expertise</a:t>
             </a:r>
             <a:endParaRPr lang="en-US" sz="1600" dirty="0">
               <a:solidFill>
@@ -6523,7 +6949,7 @@
               <a:rPr lang="en-US" sz="1600" dirty="0"/>
               <a:t>Adding metadata to container labels sped up lookups</a:t>
             </a:r>
-            <a:endParaRPr lang="en-US" sz="1600" dirty="0">
+            <a:endParaRPr lang="en-US" sz="1600">
               <a:solidFill>
                 <a:srgbClr val="000000"/>
               </a:solidFill>
@@ -6539,25 +6965,25 @@
               <a:rPr lang="en-US" sz="1600" dirty="0"/>
               <a:t>Anyone could inspect images with digest to get the metadata</a:t>
             </a:r>
-            <a:endParaRPr lang="en-US" sz="1600" dirty="0">
-              <a:solidFill>
-                <a:srgbClr val="000000"/>
-              </a:solidFill>
-            </a:endParaRPr>
+            <a:endParaRPr lang="en-US"/>
           </a:p>
           <a:p>
-            <a:pPr marL="457200" lvl="0" indent="-228600" algn="l">
+            <a:pPr marL="514350" indent="-285750">
               <a:lnSpc>
                 <a:spcPct val="114999"/>
               </a:lnSpc>
-              <a:spcBef>
-                <a:spcPts val="0"/>
-              </a:spcBef>
-              <a:spcAft>
-                <a:spcPts val="0"/>
-              </a:spcAft>
-              <a:buSzPts val="1400"/>
-              <a:buFont typeface="Roboto Slab"/>
+            </a:pPr>
+            <a:r>
+              <a:rPr lang="en-US" sz="1600" dirty="0"/>
+              <a:t>Used a prefix to quickly filter for our labels</a:t>
+            </a:r>
+            <a:endParaRPr lang="en-US" dirty="0"/>
+          </a:p>
+          <a:p>
+            <a:pPr indent="-228600">
+              <a:lnSpc>
+                <a:spcPct val="114999"/>
+              </a:lnSpc>
               <a:buNone/>
             </a:pPr>
             <a:endParaRPr lang="en-US" sz="1600" dirty="0"/>
@@ -6591,11 +7017,11 @@
         </p:spPr>
         <p:txBody>
           <a:bodyPr spcFirstLastPara="1" wrap="square" lIns="91425" tIns="91425" rIns="91425" bIns="91425" anchor="t" anchorCtr="0">
-            <a:normAutofit/>
+            <a:normAutofit lnSpcReduction="10000"/>
           </a:bodyPr>
           <a:lstStyle/>
           <a:p>
-            <a:pPr marL="228600" indent="0">
+            <a:pPr marL="91440" indent="0">
               <a:lnSpc>
                 <a:spcPct val="114999"/>
               </a:lnSpc>
@@ -6610,31 +7036,6 @@
                 <a:cs typeface="Courier New"/>
               </a:rPr>
               <a:t>{</a:t>
-            </a:r>
-            <a:endParaRPr lang="en-US" sz="1200">
-              <a:solidFill>
-                <a:schemeClr val="bg1"/>
-              </a:solidFill>
-              <a:latin typeface="Courier New"/>
-              <a:cs typeface="Courier New"/>
-            </a:endParaRPr>
-          </a:p>
-          <a:p>
-            <a:pPr marL="228600" indent="0">
-              <a:lnSpc>
-                <a:spcPct val="114999"/>
-              </a:lnSpc>
-              <a:buNone/>
-            </a:pPr>
-            <a:r>
-              <a:rPr lang="en-US" sz="1200" b="1" dirty="0">
-                <a:solidFill>
-                  <a:schemeClr val="bg1"/>
-                </a:solidFill>
-                <a:latin typeface="Courier New"/>
-                <a:cs typeface="Courier New"/>
-              </a:rPr>
-              <a:t>...</a:t>
             </a:r>
             <a:endParaRPr lang="en-US" sz="1200" dirty="0">
               <a:solidFill>
@@ -6645,7 +7046,7 @@
             </a:endParaRPr>
           </a:p>
           <a:p>
-            <a:pPr marL="228600" indent="0">
+            <a:pPr marL="91440" indent="0">
               <a:lnSpc>
                 <a:spcPct val="114999"/>
               </a:lnSpc>
@@ -6659,232 +7060,7 @@
                 <a:latin typeface="Courier New"/>
                 <a:cs typeface="Courier New"/>
               </a:rPr>
-              <a:t>"</a:t>
-            </a:r>
-            <a:r>
-              <a:rPr lang="en-US" sz="1200" b="1" dirty="0" err="1">
-                <a:solidFill>
-                  <a:schemeClr val="bg1"/>
-                </a:solidFill>
-                <a:latin typeface="Courier New"/>
-                <a:cs typeface="Courier New"/>
-              </a:rPr>
-              <a:t>git_commit</a:t>
-            </a:r>
-            <a:r>
-              <a:rPr lang="en-US" sz="1200" b="1" dirty="0">
-                <a:solidFill>
-                  <a:schemeClr val="bg1"/>
-                </a:solidFill>
-                <a:latin typeface="Courier New"/>
-                <a:cs typeface="Courier New"/>
-              </a:rPr>
-              <a:t>": "3a97fb6",</a:t>
-            </a:r>
-            <a:endParaRPr lang="en-US" sz="1200">
-              <a:solidFill>
-                <a:schemeClr val="bg1"/>
-              </a:solidFill>
-              <a:latin typeface="Courier New"/>
-              <a:cs typeface="Courier New"/>
-            </a:endParaRPr>
-          </a:p>
-          <a:p>
-            <a:pPr marL="228600" indent="0">
-              <a:lnSpc>
-                <a:spcPct val="114999"/>
-              </a:lnSpc>
-              <a:buNone/>
-            </a:pPr>
-            <a:r>
-              <a:rPr lang="en-US" sz="1200" b="1" dirty="0">
-                <a:solidFill>
-                  <a:schemeClr val="bg1"/>
-                </a:solidFill>
-                <a:latin typeface="Courier New"/>
-                <a:cs typeface="Courier New"/>
-              </a:rPr>
-              <a:t>"</a:t>
-            </a:r>
-            <a:r>
-              <a:rPr lang="en-US" sz="1200" b="1" dirty="0" err="1">
-                <a:solidFill>
-                  <a:schemeClr val="bg1"/>
-                </a:solidFill>
-                <a:latin typeface="Courier New"/>
-                <a:cs typeface="Courier New"/>
-              </a:rPr>
-              <a:t>is_hotfix</a:t>
-            </a:r>
-            <a:r>
-              <a:rPr lang="en-US" sz="1200" b="1" dirty="0">
-                <a:solidFill>
-                  <a:schemeClr val="bg1"/>
-                </a:solidFill>
-                <a:latin typeface="Courier New"/>
-                <a:cs typeface="Courier New"/>
-              </a:rPr>
-              <a:t>": "true",</a:t>
-            </a:r>
-            <a:endParaRPr lang="en-US" sz="1200">
-              <a:solidFill>
-                <a:schemeClr val="bg1"/>
-              </a:solidFill>
-              <a:latin typeface="Courier New"/>
-              <a:cs typeface="Courier New"/>
-            </a:endParaRPr>
-          </a:p>
-          <a:p>
-            <a:pPr marL="228600" indent="0">
-              <a:lnSpc>
-                <a:spcPct val="114999"/>
-              </a:lnSpc>
-              <a:buNone/>
-            </a:pPr>
-            <a:r>
-              <a:rPr lang="en-US" sz="1200" dirty="0">
-                <a:solidFill>
-                  <a:schemeClr val="bg1"/>
-                </a:solidFill>
-                <a:latin typeface="Courier New"/>
-                <a:cs typeface="Courier New"/>
-              </a:rPr>
-              <a:t>"</a:t>
-            </a:r>
-            <a:r>
-              <a:rPr lang="en-US" sz="1200" b="1" dirty="0" err="1">
-                <a:solidFill>
-                  <a:schemeClr val="bg1"/>
-                </a:solidFill>
-                <a:latin typeface="Courier New"/>
-                <a:cs typeface="Courier New"/>
-              </a:rPr>
-              <a:t>hotfix_reference</a:t>
-            </a:r>
-            <a:r>
-              <a:rPr lang="en-US" sz="1200" dirty="0">
-                <a:solidFill>
-                  <a:schemeClr val="bg1"/>
-                </a:solidFill>
-                <a:latin typeface="Courier New"/>
-                <a:cs typeface="Courier New"/>
-              </a:rPr>
-              <a:t>": "</a:t>
-            </a:r>
-            <a:r>
-              <a:rPr lang="en-US" sz="1200" b="1" dirty="0">
-                <a:solidFill>
-                  <a:schemeClr val="bg1"/>
-                </a:solidFill>
-                <a:latin typeface="Courier New"/>
-                <a:cs typeface="Courier New"/>
-              </a:rPr>
-              <a:t>78219</a:t>
-            </a:r>
-            <a:r>
-              <a:rPr lang="en-US" sz="1200" dirty="0">
-                <a:solidFill>
-                  <a:schemeClr val="bg1"/>
-                </a:solidFill>
-                <a:latin typeface="Courier New"/>
-                <a:cs typeface="Courier New"/>
-              </a:rPr>
-              <a:t>",</a:t>
-            </a:r>
-            <a:endParaRPr lang="en-US" sz="1200">
-              <a:solidFill>
-                <a:schemeClr val="bg1"/>
-              </a:solidFill>
-              <a:latin typeface="Courier New"/>
-              <a:cs typeface="Courier New"/>
-            </a:endParaRPr>
-          </a:p>
-          <a:p>
-            <a:pPr marL="228600" indent="0">
-              <a:lnSpc>
-                <a:spcPct val="114999"/>
-              </a:lnSpc>
-              <a:buNone/>
-            </a:pPr>
-            <a:r>
-              <a:rPr lang="en-US" sz="1200" b="1" dirty="0">
-                <a:solidFill>
-                  <a:schemeClr val="bg1"/>
-                </a:solidFill>
-                <a:latin typeface="Courier New"/>
-                <a:cs typeface="Courier New"/>
-              </a:rPr>
-              <a:t>"internal": "true",</a:t>
-            </a:r>
-            <a:endParaRPr lang="en-US" sz="1200">
-              <a:solidFill>
-                <a:schemeClr val="bg1"/>
-              </a:solidFill>
-              <a:latin typeface="Courier New"/>
-              <a:cs typeface="Courier New"/>
-            </a:endParaRPr>
-          </a:p>
-          <a:p>
-            <a:pPr marL="228600" indent="0">
-              <a:lnSpc>
-                <a:spcPct val="114999"/>
-              </a:lnSpc>
-              <a:buNone/>
-            </a:pPr>
-            <a:r>
-              <a:rPr lang="en-US" sz="1200" b="1" dirty="0">
-                <a:solidFill>
-                  <a:schemeClr val="bg1"/>
-                </a:solidFill>
-                <a:latin typeface="Courier New"/>
-                <a:cs typeface="Courier New"/>
-              </a:rPr>
-              <a:t>"</a:t>
-            </a:r>
-            <a:r>
-              <a:rPr lang="en-US" sz="1200" b="1" dirty="0" err="1">
-                <a:solidFill>
-                  <a:schemeClr val="bg1"/>
-                </a:solidFill>
-                <a:latin typeface="Courier New"/>
-                <a:cs typeface="Courier New"/>
-              </a:rPr>
-              <a:t>backup_service_version</a:t>
-            </a:r>
-            <a:r>
-              <a:rPr lang="en-US" sz="1200" b="1" dirty="0">
-                <a:solidFill>
-                  <a:schemeClr val="bg1"/>
-                </a:solidFill>
-                <a:latin typeface="Courier New"/>
-                <a:cs typeface="Courier New"/>
-              </a:rPr>
-              <a:t>": "v15.5”</a:t>
-            </a:r>
-            <a:endParaRPr lang="en-US" sz="1200">
-              <a:solidFill>
-                <a:schemeClr val="bg1"/>
-              </a:solidFill>
-              <a:latin typeface="Courier New"/>
-              <a:cs typeface="Courier New"/>
-            </a:endParaRPr>
-          </a:p>
-          <a:p>
-            <a:pPr marL="228600" indent="0">
-              <a:lnSpc>
-                <a:spcPct val="114999"/>
-              </a:lnSpc>
-              <a:buNone/>
-            </a:pPr>
-            <a:r>
-              <a:rPr lang="en-US" sz="1200" b="1" dirty="0">
-                <a:solidFill>
-                  <a:schemeClr val="bg1"/>
-                </a:solidFill>
-                <a:latin typeface="Courier New"/>
-                <a:cs typeface="Courier New"/>
-              </a:rPr>
-              <a:t>...</a:t>
+              <a:t>  ...</a:t>
             </a:r>
             <a:endParaRPr lang="en-US" sz="1200" dirty="0">
               <a:solidFill>
@@ -6895,16 +7071,322 @@
             </a:endParaRPr>
           </a:p>
           <a:p>
-            <a:pPr marL="228600" lvl="0" indent="0" algn="l">
+            <a:pPr marL="91440" indent="0">
               <a:lnSpc>
                 <a:spcPct val="114999"/>
               </a:lnSpc>
-              <a:spcBef>
-                <a:spcPts val="0"/>
-              </a:spcBef>
-              <a:spcAft>
-                <a:spcPts val="0"/>
-              </a:spcAft>
+              <a:buNone/>
+            </a:pPr>
+            <a:r>
+              <a:rPr lang="en-US" sz="1200" b="1" dirty="0">
+                <a:solidFill>
+                  <a:schemeClr val="bg1"/>
+                </a:solidFill>
+                <a:latin typeface="Courier New"/>
+                <a:cs typeface="Courier New"/>
+              </a:rPr>
+              <a:t>  "</a:t>
+            </a:r>
+            <a:r>
+              <a:rPr lang="en-US" sz="1200" b="1" dirty="0" err="1">
+                <a:solidFill>
+                  <a:schemeClr val="bg1"/>
+                </a:solidFill>
+                <a:latin typeface="Courier New"/>
+                <a:cs typeface="Courier New"/>
+              </a:rPr>
+              <a:t>isf.git_commit</a:t>
+            </a:r>
+            <a:r>
+              <a:rPr lang="en-US" sz="1200" b="1" dirty="0">
+                <a:solidFill>
+                  <a:schemeClr val="bg1"/>
+                </a:solidFill>
+                <a:latin typeface="Courier New"/>
+                <a:cs typeface="Courier New"/>
+              </a:rPr>
+              <a:t>": "3a97fb6",</a:t>
+            </a:r>
+            <a:endParaRPr lang="en-US" sz="1200" dirty="0">
+              <a:solidFill>
+                <a:schemeClr val="bg1"/>
+              </a:solidFill>
+              <a:latin typeface="Courier New"/>
+              <a:cs typeface="Courier New"/>
+            </a:endParaRPr>
+          </a:p>
+          <a:p>
+            <a:pPr marL="91440" indent="0">
+              <a:lnSpc>
+                <a:spcPct val="114999"/>
+              </a:lnSpc>
+              <a:buNone/>
+            </a:pPr>
+            <a:r>
+              <a:rPr lang="en-US" sz="1200" b="1" dirty="0">
+                <a:solidFill>
+                  <a:schemeClr val="bg1"/>
+                </a:solidFill>
+                <a:latin typeface="Courier New"/>
+                <a:cs typeface="Courier New"/>
+              </a:rPr>
+              <a:t>  "</a:t>
+            </a:r>
+            <a:r>
+              <a:rPr lang="en-US" sz="1200" b="1" dirty="0" err="1">
+                <a:solidFill>
+                  <a:schemeClr val="bg1"/>
+                </a:solidFill>
+                <a:latin typeface="Courier New"/>
+                <a:cs typeface="Courier New"/>
+              </a:rPr>
+              <a:t>isf.version</a:t>
+            </a:r>
+            <a:r>
+              <a:rPr lang="en-US" sz="1200" b="1" dirty="0">
+                <a:solidFill>
+                  <a:schemeClr val="bg1"/>
+                </a:solidFill>
+                <a:latin typeface="Courier New"/>
+                <a:cs typeface="Courier New"/>
+              </a:rPr>
+              <a:t>": "2.11.1",</a:t>
+            </a:r>
+          </a:p>
+          <a:p>
+            <a:pPr marL="91440" indent="0">
+              <a:lnSpc>
+                <a:spcPct val="114999"/>
+              </a:lnSpc>
+              <a:buNone/>
+            </a:pPr>
+            <a:r>
+              <a:rPr lang="en-US" sz="1200" b="1" dirty="0">
+                <a:solidFill>
+                  <a:schemeClr val="bg1"/>
+                </a:solidFill>
+                <a:latin typeface="Courier New"/>
+                <a:cs typeface="Courier New"/>
+              </a:rPr>
+              <a:t>  "</a:t>
+            </a:r>
+            <a:r>
+              <a:rPr lang="en-US" sz="1200" b="1" dirty="0" err="1">
+                <a:solidFill>
+                  <a:schemeClr val="bg1"/>
+                </a:solidFill>
+                <a:latin typeface="Courier New"/>
+                <a:cs typeface="Courier New"/>
+              </a:rPr>
+              <a:t>isf.run_id</a:t>
+            </a:r>
+            <a:r>
+              <a:rPr lang="en-US" sz="1200" b="1" dirty="0">
+                <a:solidFill>
+                  <a:schemeClr val="bg1"/>
+                </a:solidFill>
+                <a:latin typeface="Courier New"/>
+                <a:cs typeface="Courier New"/>
+              </a:rPr>
+              <a:t>": "64t-6vw",</a:t>
+            </a:r>
+          </a:p>
+          <a:p>
+            <a:pPr marL="91440" indent="0">
+              <a:lnSpc>
+                <a:spcPct val="114999"/>
+              </a:lnSpc>
+              <a:buNone/>
+            </a:pPr>
+            <a:r>
+              <a:rPr lang="en-US" sz="1200" b="1" dirty="0">
+                <a:solidFill>
+                  <a:schemeClr val="bg1"/>
+                </a:solidFill>
+                <a:latin typeface="Courier New"/>
+                <a:cs typeface="Courier New"/>
+              </a:rPr>
+              <a:t>  "</a:t>
+            </a:r>
+            <a:r>
+              <a:rPr lang="en-US" sz="1200" b="1" dirty="0" err="1">
+                <a:solidFill>
+                  <a:schemeClr val="bg1"/>
+                </a:solidFill>
+                <a:latin typeface="Courier New"/>
+                <a:cs typeface="Courier New"/>
+              </a:rPr>
+              <a:t>isf.is_hotfix</a:t>
+            </a:r>
+            <a:r>
+              <a:rPr lang="en-US" sz="1200" b="1" dirty="0">
+                <a:solidFill>
+                  <a:schemeClr val="bg1"/>
+                </a:solidFill>
+                <a:latin typeface="Courier New"/>
+                <a:cs typeface="Courier New"/>
+              </a:rPr>
+              <a:t>": "true",</a:t>
+            </a:r>
+          </a:p>
+          <a:p>
+            <a:pPr marL="91440" indent="0">
+              <a:lnSpc>
+                <a:spcPct val="114999"/>
+              </a:lnSpc>
+              <a:buNone/>
+            </a:pPr>
+            <a:r>
+              <a:rPr lang="en-US" sz="1200" b="1" dirty="0">
+                <a:solidFill>
+                  <a:schemeClr val="bg1"/>
+                </a:solidFill>
+                <a:latin typeface="Courier New"/>
+                <a:cs typeface="Courier New"/>
+              </a:rPr>
+              <a:t>  "</a:t>
+            </a:r>
+            <a:r>
+              <a:rPr lang="en-US" sz="1200" b="1" dirty="0" err="1">
+                <a:solidFill>
+                  <a:schemeClr val="bg1"/>
+                </a:solidFill>
+                <a:latin typeface="Courier New"/>
+                <a:cs typeface="Courier New"/>
+              </a:rPr>
+              <a:t>isf.hotfix_reference</a:t>
+            </a:r>
+            <a:r>
+              <a:rPr lang="en-US" sz="1200" b="1" dirty="0">
+                <a:solidFill>
+                  <a:schemeClr val="bg1"/>
+                </a:solidFill>
+                <a:latin typeface="Courier New"/>
+                <a:cs typeface="Courier New"/>
+              </a:rPr>
+              <a:t>": "78219",</a:t>
+            </a:r>
+          </a:p>
+          <a:p>
+            <a:pPr marL="91440" indent="0">
+              <a:lnSpc>
+                <a:spcPct val="114999"/>
+              </a:lnSpc>
+              <a:buNone/>
+            </a:pPr>
+            <a:r>
+              <a:rPr lang="en-US" sz="1200" b="1" dirty="0">
+                <a:solidFill>
+                  <a:schemeClr val="bg1"/>
+                </a:solidFill>
+                <a:latin typeface="Courier New"/>
+                <a:cs typeface="Courier New"/>
+              </a:rPr>
+              <a:t>  "</a:t>
+            </a:r>
+            <a:r>
+              <a:rPr lang="en-US" sz="1200" b="1" dirty="0" err="1">
+                <a:solidFill>
+                  <a:schemeClr val="bg1"/>
+                </a:solidFill>
+                <a:latin typeface="Courier New"/>
+                <a:cs typeface="Courier New"/>
+              </a:rPr>
+              <a:t>isf.internal</a:t>
+            </a:r>
+            <a:r>
+              <a:rPr lang="en-US" sz="1200" b="1" dirty="0">
+                <a:solidFill>
+                  <a:schemeClr val="bg1"/>
+                </a:solidFill>
+                <a:latin typeface="Courier New"/>
+                <a:cs typeface="Courier New"/>
+              </a:rPr>
+              <a:t>": "true",</a:t>
+            </a:r>
+            <a:endParaRPr lang="en-US" sz="1200" dirty="0">
+              <a:solidFill>
+                <a:schemeClr val="bg1"/>
+              </a:solidFill>
+              <a:latin typeface="Courier New"/>
+              <a:cs typeface="Courier New"/>
+            </a:endParaRPr>
+          </a:p>
+          <a:p>
+            <a:pPr marL="91440" indent="0">
+              <a:lnSpc>
+                <a:spcPct val="114999"/>
+              </a:lnSpc>
+              <a:buNone/>
+            </a:pPr>
+            <a:r>
+              <a:rPr lang="en-US" sz="1200" b="1" dirty="0">
+                <a:solidFill>
+                  <a:schemeClr val="bg1"/>
+                </a:solidFill>
+                <a:latin typeface="Courier New"/>
+                <a:cs typeface="Courier New"/>
+              </a:rPr>
+              <a:t>  "</a:t>
+            </a:r>
+            <a:r>
+              <a:rPr lang="en-US" sz="1200" b="1" dirty="0" err="1">
+                <a:solidFill>
+                  <a:schemeClr val="bg1"/>
+                </a:solidFill>
+                <a:latin typeface="Courier New"/>
+                <a:cs typeface="Courier New"/>
+              </a:rPr>
+              <a:t>isf.backup_service</a:t>
+            </a:r>
+            <a:r>
+              <a:rPr lang="en-US" sz="1200" b="1" dirty="0">
+                <a:solidFill>
+                  <a:schemeClr val="bg1"/>
+                </a:solidFill>
+                <a:latin typeface="Courier New"/>
+                <a:cs typeface="Courier New"/>
+              </a:rPr>
+              <a:t>": "v15.5”</a:t>
+            </a:r>
+            <a:endParaRPr lang="en-US" sz="1200" dirty="0">
+              <a:solidFill>
+                <a:schemeClr val="bg1"/>
+              </a:solidFill>
+              <a:latin typeface="Courier New"/>
+              <a:cs typeface="Courier New"/>
+            </a:endParaRPr>
+          </a:p>
+          <a:p>
+            <a:pPr marL="91440" indent="0">
+              <a:lnSpc>
+                <a:spcPct val="114999"/>
+              </a:lnSpc>
+              <a:buNone/>
+            </a:pPr>
+            <a:r>
+              <a:rPr lang="en-US" sz="1200" b="1" dirty="0">
+                <a:solidFill>
+                  <a:schemeClr val="bg1"/>
+                </a:solidFill>
+                <a:latin typeface="Courier New"/>
+                <a:cs typeface="Courier New"/>
+              </a:rPr>
+              <a:t>  ...</a:t>
+            </a:r>
+            <a:endParaRPr lang="en-US" sz="1200" dirty="0">
+              <a:solidFill>
+                <a:schemeClr val="bg1"/>
+              </a:solidFill>
+              <a:latin typeface="Courier New"/>
+              <a:cs typeface="Courier New"/>
+            </a:endParaRPr>
+          </a:p>
+          <a:p>
+            <a:pPr marL="91440" indent="0">
+              <a:lnSpc>
+                <a:spcPct val="114999"/>
+              </a:lnSpc>
               <a:buNone/>
             </a:pPr>
             <a:r>
@@ -6925,6 +7407,36 @@
           </a:p>
         </p:txBody>
       </p:sp>
+      <p:pic>
+        <p:nvPicPr>
+          <p:cNvPr id="3" name="Picture 2">
+            <a:extLst>
+              <a:ext uri="{FF2B5EF4-FFF2-40B4-BE49-F238E27FC236}">
+                <a16:creationId xmlns:a16="http://schemas.microsoft.com/office/drawing/2014/main" id="{5CB14F7C-E463-1928-F311-67C2A197BFF2}"/>
+              </a:ext>
+            </a:extLst>
+          </p:cNvPr>
+          <p:cNvPicPr>
+            <a:picLocks noChangeAspect="1"/>
+          </p:cNvPicPr>
+          <p:nvPr/>
+        </p:nvPicPr>
+        <p:blipFill>
+          <a:blip r:embed="rId3"/>
+          <a:stretch>
+            <a:fillRect/>
+          </a:stretch>
+        </p:blipFill>
+        <p:spPr>
+          <a:xfrm>
+            <a:off x="8290152" y="4520972"/>
+            <a:ext cx="540885" cy="540885"/>
+          </a:xfrm>
+          <a:prstGeom prst="rect">
+            <a:avLst/>
+          </a:prstGeom>
+        </p:spPr>
+      </p:pic>
     </p:spTree>
   </p:cSld>
   <p:clrMapOvr>
@@ -6938,10 +7450,10 @@
   <p:cSld>
     <p:spTree>
       <p:nvGrpSpPr>
-        <p:cNvPr id="1" name="Shape 53">
+        <p:cNvPr id="1" name="Shape 59">
           <a:extLst>
             <a:ext uri="{FF2B5EF4-FFF2-40B4-BE49-F238E27FC236}">
-              <a16:creationId xmlns:a16="http://schemas.microsoft.com/office/drawing/2014/main" id="{D0EB7F24-D70C-68BF-4284-0B484DA7E65E}"/>
+              <a16:creationId xmlns:a16="http://schemas.microsoft.com/office/drawing/2014/main" id="{D6B34398-EA7F-80F9-E9E0-89F4F01BD435}"/>
             </a:ext>
           </a:extLst>
         </p:cNvPr>
@@ -6958,10 +7470,10 @@
       </p:grpSpPr>
       <p:sp>
         <p:nvSpPr>
-          <p:cNvPr id="54" name="Google Shape;54;g31b75ad4c98_0_0">
+          <p:cNvPr id="60" name="Google Shape;60;p4">
             <a:extLst>
               <a:ext uri="{FF2B5EF4-FFF2-40B4-BE49-F238E27FC236}">
-                <a16:creationId xmlns:a16="http://schemas.microsoft.com/office/drawing/2014/main" id="{71588D80-3FA8-1DEC-312F-2E626C95C312}"/>
+                <a16:creationId xmlns:a16="http://schemas.microsoft.com/office/drawing/2014/main" id="{F959A41D-DC41-CBAC-1C5E-FB10282D3AA3}"/>
               </a:ext>
             </a:extLst>
           </p:cNvPr>
@@ -6991,20 +7503,1092 @@
           </a:bodyPr>
           <a:lstStyle/>
           <a:p>
-            <a:pPr latinLnBrk="0"/>
             <a:r>
               <a:rPr lang="en-US" dirty="0"/>
-              <a:t>Immediate Benefits</a:t>
+              <a:t>Immediate Benefits </a:t>
+            </a:r>
+          </a:p>
+        </p:txBody>
+      </p:sp>
+      <p:pic>
+        <p:nvPicPr>
+          <p:cNvPr id="3" name="Picture 2">
+            <a:extLst>
+              <a:ext uri="{FF2B5EF4-FFF2-40B4-BE49-F238E27FC236}">
+                <a16:creationId xmlns:a16="http://schemas.microsoft.com/office/drawing/2014/main" id="{EE2470D7-95F1-353A-0624-F899EC4F000E}"/>
+              </a:ext>
+            </a:extLst>
+          </p:cNvPr>
+          <p:cNvPicPr>
+            <a:picLocks noChangeAspect="1"/>
+          </p:cNvPicPr>
+          <p:nvPr/>
+        </p:nvPicPr>
+        <p:blipFill>
+          <a:blip r:embed="rId3"/>
+          <a:stretch>
+            <a:fillRect/>
+          </a:stretch>
+        </p:blipFill>
+        <p:spPr>
+          <a:xfrm>
+            <a:off x="8290152" y="4520972"/>
+            <a:ext cx="540885" cy="540885"/>
+          </a:xfrm>
+          <a:prstGeom prst="rect">
+            <a:avLst/>
+          </a:prstGeom>
+        </p:spPr>
+      </p:pic>
+      <p:graphicFrame>
+        <p:nvGraphicFramePr>
+          <p:cNvPr id="6" name="Table 5">
+            <a:extLst>
+              <a:ext uri="{FF2B5EF4-FFF2-40B4-BE49-F238E27FC236}">
+                <a16:creationId xmlns:a16="http://schemas.microsoft.com/office/drawing/2014/main" id="{134B1712-8080-3B12-84F6-4AB35C9747AD}"/>
+              </a:ext>
+            </a:extLst>
+          </p:cNvPr>
+          <p:cNvGraphicFramePr>
+            <a:graphicFrameLocks noGrp="1"/>
+          </p:cNvGraphicFramePr>
+          <p:nvPr>
+            <p:extLst>
+              <p:ext uri="{D42A27DB-BD31-4B8C-83A1-F6EECF244321}">
+                <p14:modId xmlns:p14="http://schemas.microsoft.com/office/powerpoint/2010/main" val="3434073979"/>
+              </p:ext>
+            </p:extLst>
+          </p:nvPr>
+        </p:nvGraphicFramePr>
+        <p:xfrm>
+          <a:off x="4425723" y="1153205"/>
+          <a:ext cx="4564843" cy="1883568"/>
+        </p:xfrm>
+        <a:graphic>
+          <a:graphicData uri="http://schemas.openxmlformats.org/drawingml/2006/table">
+            <a:tbl>
+              <a:tblPr firstRow="1" firstCol="1" lastCol="1" bandRow="1">
+                <a:tableStyleId>{5202B0CA-FC54-4496-8BCA-5EF66A818D29}</a:tableStyleId>
+              </a:tblPr>
+              <a:tblGrid>
+                <a:gridCol w="928684">
+                  <a:extLst>
+                    <a:ext uri="{9D8B030D-6E8A-4147-A177-3AD203B41FA5}">
+                      <a16:colId xmlns:a16="http://schemas.microsoft.com/office/drawing/2014/main" val="623926268"/>
+                    </a:ext>
+                  </a:extLst>
+                </a:gridCol>
+                <a:gridCol w="1217833">
+                  <a:extLst>
+                    <a:ext uri="{9D8B030D-6E8A-4147-A177-3AD203B41FA5}">
+                      <a16:colId xmlns:a16="http://schemas.microsoft.com/office/drawing/2014/main" val="2416143061"/>
+                    </a:ext>
+                  </a:extLst>
+                </a:gridCol>
+                <a:gridCol w="1102178">
+                  <a:extLst>
+                    <a:ext uri="{9D8B030D-6E8A-4147-A177-3AD203B41FA5}">
+                      <a16:colId xmlns:a16="http://schemas.microsoft.com/office/drawing/2014/main" val="2731128621"/>
+                    </a:ext>
+                  </a:extLst>
+                </a:gridCol>
+                <a:gridCol w="1316148">
+                  <a:extLst>
+                    <a:ext uri="{9D8B030D-6E8A-4147-A177-3AD203B41FA5}">
+                      <a16:colId xmlns:a16="http://schemas.microsoft.com/office/drawing/2014/main" val="3002297832"/>
+                    </a:ext>
+                  </a:extLst>
+                </a:gridCol>
+              </a:tblGrid>
+              <a:tr h="470892">
+                <a:tc>
+                  <a:txBody>
+                    <a:bodyPr/>
+                    <a:lstStyle/>
+                    <a:p>
+                      <a:pPr marL="0" algn="ctr" rtl="0" eaLnBrk="1" latinLnBrk="0" hangingPunct="1">
+                        <a:buNone/>
+                      </a:pPr>
+                      <a:r>
+                        <a:rPr lang="en-US" sz="1000" kern="1200" dirty="0">
+                          <a:solidFill>
+                            <a:schemeClr val="bg1"/>
+                          </a:solidFill>
+                          <a:effectLst/>
+                        </a:rPr>
+                        <a:t>Operator</a:t>
+                      </a:r>
+                      <a:endParaRPr lang="en-US" sz="1000">
+                        <a:solidFill>
+                          <a:schemeClr val="bg1"/>
+                        </a:solidFill>
+                        <a:effectLst/>
+                      </a:endParaRPr>
+                    </a:p>
+                  </a:txBody>
+                  <a:tcPr marL="0" marR="0" marT="0" marB="0" anchor="ctr"/>
+                </a:tc>
+                <a:tc>
+                  <a:txBody>
+                    <a:bodyPr/>
+                    <a:lstStyle/>
+                    <a:p>
+                      <a:pPr marL="0" algn="ctr" rtl="0" eaLnBrk="1" latinLnBrk="0" hangingPunct="1">
+                        <a:buNone/>
+                      </a:pPr>
+                      <a:r>
+                        <a:rPr lang="en-US" sz="1000" kern="1200" dirty="0">
+                          <a:solidFill>
+                            <a:schemeClr val="bg1"/>
+                          </a:solidFill>
+                          <a:effectLst/>
+                        </a:rPr>
+                        <a:t>Working </a:t>
+                      </a:r>
+                      <a:endParaRPr lang="en-US" sz="1000" dirty="0">
+                        <a:solidFill>
+                          <a:schemeClr val="bg1"/>
+                        </a:solidFill>
+                        <a:effectLst/>
+                      </a:endParaRPr>
+                    </a:p>
+                    <a:p>
+                      <a:pPr marL="0" lvl="0" algn="ctr">
+                        <a:buNone/>
+                      </a:pPr>
+                      <a:r>
+                        <a:rPr lang="en-US" sz="1000" kern="1200" dirty="0">
+                          <a:solidFill>
+                            <a:schemeClr val="bg1"/>
+                          </a:solidFill>
+                          <a:effectLst/>
+                        </a:rPr>
+                        <a:t>Build Log</a:t>
+                      </a:r>
+                      <a:endParaRPr lang="en-US" sz="1000" dirty="0">
+                        <a:solidFill>
+                          <a:schemeClr val="bg1"/>
+                        </a:solidFill>
+                        <a:effectLst/>
+                      </a:endParaRPr>
+                    </a:p>
+                    <a:p>
+                      <a:pPr marL="0" lvl="0" algn="ctr">
+                        <a:buNone/>
+                      </a:pPr>
+                      <a:r>
+                        <a:rPr lang="en-US" sz="1000" kern="1200" dirty="0">
+                          <a:solidFill>
+                            <a:schemeClr val="bg1"/>
+                          </a:solidFill>
+                          <a:effectLst/>
+                        </a:rPr>
+                        <a:t>20260407</a:t>
+                      </a:r>
+                      <a:endParaRPr lang="en-US" sz="1000" dirty="0">
+                        <a:solidFill>
+                          <a:schemeClr val="bg1"/>
+                        </a:solidFill>
+                        <a:effectLst/>
+                      </a:endParaRPr>
+                    </a:p>
+                  </a:txBody>
+                  <a:tcPr marL="0" marR="0" marT="0" marB="0" anchor="ctr"/>
+                </a:tc>
+                <a:tc>
+                  <a:txBody>
+                    <a:bodyPr/>
+                    <a:lstStyle/>
+                    <a:p>
+                      <a:pPr marL="0" algn="ctr" rtl="0" eaLnBrk="1" latinLnBrk="0" hangingPunct="1">
+                        <a:buNone/>
+                      </a:pPr>
+                      <a:r>
+                        <a:rPr lang="en-US" sz="1000" kern="1200" dirty="0">
+                          <a:solidFill>
+                            <a:schemeClr val="bg1"/>
+                          </a:solidFill>
+                          <a:effectLst/>
+                        </a:rPr>
+                        <a:t>Broken </a:t>
+                      </a:r>
+                      <a:endParaRPr lang="en-US" sz="1000" dirty="0">
+                        <a:solidFill>
+                          <a:schemeClr val="bg1"/>
+                        </a:solidFill>
+                        <a:effectLst/>
+                      </a:endParaRPr>
+                    </a:p>
+                    <a:p>
+                      <a:pPr marL="0" lvl="0" algn="ctr">
+                        <a:buNone/>
+                      </a:pPr>
+                      <a:r>
+                        <a:rPr lang="en-US" sz="1000" kern="1200" dirty="0">
+                          <a:solidFill>
+                            <a:schemeClr val="bg1"/>
+                          </a:solidFill>
+                          <a:effectLst/>
+                        </a:rPr>
+                        <a:t>Build Log</a:t>
+                      </a:r>
+                      <a:endParaRPr lang="en-US" sz="1000" dirty="0">
+                        <a:solidFill>
+                          <a:schemeClr val="bg1"/>
+                        </a:solidFill>
+                        <a:effectLst/>
+                      </a:endParaRPr>
+                    </a:p>
+                    <a:p>
+                      <a:pPr marL="0" lvl="0" algn="ctr">
+                        <a:buNone/>
+                      </a:pPr>
+                      <a:r>
+                        <a:rPr lang="en-US" sz="1000" kern="1200" dirty="0">
+                          <a:solidFill>
+                            <a:schemeClr val="bg1"/>
+                          </a:solidFill>
+                          <a:effectLst/>
+                        </a:rPr>
+                        <a:t>20260409</a:t>
+                      </a:r>
+                      <a:endParaRPr lang="en-US" sz="1000" dirty="0">
+                        <a:solidFill>
+                          <a:schemeClr val="bg1"/>
+                        </a:solidFill>
+                        <a:effectLst/>
+                      </a:endParaRPr>
+                    </a:p>
+                  </a:txBody>
+                  <a:tcPr marL="0" marR="0" marT="0" marB="0" anchor="ctr"/>
+                </a:tc>
+                <a:tc>
+                  <a:txBody>
+                    <a:bodyPr/>
+                    <a:lstStyle/>
+                    <a:p>
+                      <a:pPr marL="0" algn="ctr" rtl="0" eaLnBrk="1" latinLnBrk="0" hangingPunct="1">
+                        <a:buNone/>
+                      </a:pPr>
+                      <a:r>
+                        <a:rPr lang="en-US" sz="1000" kern="1200" dirty="0">
+                          <a:solidFill>
+                            <a:schemeClr val="bg1"/>
+                          </a:solidFill>
+                          <a:effectLst/>
+                        </a:rPr>
+                        <a:t>Git Diff</a:t>
+                      </a:r>
+                      <a:endParaRPr lang="en-US" sz="1000">
+                        <a:solidFill>
+                          <a:schemeClr val="bg1"/>
+                        </a:solidFill>
+                        <a:effectLst/>
+                      </a:endParaRPr>
+                    </a:p>
+                  </a:txBody>
+                  <a:tcPr marL="0" marR="0" marT="0" marB="0" anchor="ctr"/>
+                </a:tc>
+                <a:extLst>
+                  <a:ext uri="{0D108BD9-81ED-4DB2-BD59-A6C34878D82A}">
+                    <a16:rowId xmlns:a16="http://schemas.microsoft.com/office/drawing/2014/main" val="2247030957"/>
+                  </a:ext>
+                </a:extLst>
+              </a:tr>
+              <a:tr h="470892">
+                <a:tc>
+                  <a:txBody>
+                    <a:bodyPr/>
+                    <a:lstStyle/>
+                    <a:p>
+                      <a:pPr marL="182880" algn="l" rtl="0" eaLnBrk="1" latinLnBrk="0" hangingPunct="1">
+                        <a:buNone/>
+                      </a:pPr>
+                      <a:r>
+                        <a:rPr lang="en-US" sz="900" kern="1200" dirty="0" err="1">
+                          <a:solidFill>
+                            <a:srgbClr val="48A0C7"/>
+                          </a:solidFill>
+                          <a:effectLst/>
+                        </a:rPr>
+                        <a:t>ui</a:t>
+                      </a:r>
+                      <a:endParaRPr lang="en-US" sz="900">
+                        <a:effectLst/>
+                      </a:endParaRPr>
+                    </a:p>
+                  </a:txBody>
+                  <a:tcPr marL="0" marR="0" marT="0" marB="0" anchor="ctr">
+                    <a:solidFill>
+                      <a:schemeClr val="accent6">
+                        <a:lumMod val="95000"/>
+                      </a:schemeClr>
+                    </a:solidFill>
+                  </a:tcPr>
+                </a:tc>
+                <a:tc>
+                  <a:txBody>
+                    <a:bodyPr/>
+                    <a:lstStyle/>
+                    <a:p>
+                      <a:pPr marL="182880" algn="l" rtl="0" eaLnBrk="1" latinLnBrk="0" hangingPunct="1">
+                        <a:buNone/>
+                      </a:pPr>
+                      <a:r>
+                        <a:rPr lang="en-US" sz="900" kern="1200" dirty="0">
+                          <a:solidFill>
+                            <a:srgbClr val="48A0C7"/>
+                          </a:solidFill>
+                          <a:effectLst/>
+                        </a:rPr>
+                        <a:t>https://.../r4t-6vw</a:t>
+                      </a:r>
+                      <a:endParaRPr lang="en-US" sz="900" dirty="0">
+                        <a:effectLst/>
+                      </a:endParaRPr>
+                    </a:p>
+                  </a:txBody>
+                  <a:tcPr marL="0" marR="0" marT="0" marB="0" anchor="ctr">
+                    <a:solidFill>
+                      <a:schemeClr val="accent6">
+                        <a:lumMod val="95000"/>
+                      </a:schemeClr>
+                    </a:solidFill>
+                  </a:tcPr>
+                </a:tc>
+                <a:tc>
+                  <a:txBody>
+                    <a:bodyPr/>
+                    <a:lstStyle/>
+                    <a:p>
+                      <a:pPr marL="182880" algn="l" rtl="0" eaLnBrk="1" latinLnBrk="0" hangingPunct="1">
+                        <a:buNone/>
+                      </a:pPr>
+                      <a:r>
+                        <a:rPr lang="en-US" sz="900" kern="1200" dirty="0">
+                          <a:solidFill>
+                            <a:srgbClr val="48A0C7"/>
+                          </a:solidFill>
+                          <a:effectLst/>
+                        </a:rPr>
+                        <a:t>https://.../b3c-5de</a:t>
+                      </a:r>
+                      <a:endParaRPr lang="en-US" sz="900" dirty="0">
+                        <a:effectLst/>
+                      </a:endParaRPr>
+                    </a:p>
+                  </a:txBody>
+                  <a:tcPr marL="0" marR="0" marT="0" marB="0" anchor="ctr">
+                    <a:solidFill>
+                      <a:schemeClr val="accent6">
+                        <a:lumMod val="95000"/>
+                      </a:schemeClr>
+                    </a:solidFill>
+                  </a:tcPr>
+                </a:tc>
+                <a:tc>
+                  <a:txBody>
+                    <a:bodyPr/>
+                    <a:lstStyle/>
+                    <a:p>
+                      <a:pPr marL="182880" lvl="0" algn="l">
+                        <a:buNone/>
+                      </a:pPr>
+                      <a:r>
+                        <a:rPr lang="en-US" sz="900" b="0" i="0" u="none" strike="noStrike" kern="1200" noProof="0" dirty="0">
+                          <a:solidFill>
+                            <a:srgbClr val="48A0C7"/>
+                          </a:solidFill>
+                          <a:effectLst/>
+                          <a:latin typeface="Arial"/>
+                          <a:cs typeface="Arial"/>
+                        </a:rPr>
+                        <a:t>3a97fb6</a:t>
+                      </a:r>
+                      <a:r>
+                        <a:rPr lang="en-US" sz="900" b="0" kern="1200" dirty="0">
+                          <a:solidFill>
+                            <a:srgbClr val="48A0C7"/>
+                          </a:solidFill>
+                          <a:effectLst/>
+                        </a:rPr>
+                        <a:t>...6a1d8e3</a:t>
+                      </a:r>
+                      <a:endParaRPr lang="en-US" sz="900" b="0">
+                        <a:effectLst/>
+                      </a:endParaRPr>
+                    </a:p>
+                  </a:txBody>
+                  <a:tcPr marL="0" marR="0" marT="0" marB="0" anchor="ctr">
+                    <a:solidFill>
+                      <a:schemeClr val="accent6">
+                        <a:lumMod val="95000"/>
+                      </a:schemeClr>
+                    </a:solidFill>
+                  </a:tcPr>
+                </a:tc>
+                <a:extLst>
+                  <a:ext uri="{0D108BD9-81ED-4DB2-BD59-A6C34878D82A}">
+                    <a16:rowId xmlns:a16="http://schemas.microsoft.com/office/drawing/2014/main" val="2345347692"/>
+                  </a:ext>
+                </a:extLst>
+              </a:tr>
+              <a:tr h="470892">
+                <a:tc>
+                  <a:txBody>
+                    <a:bodyPr/>
+                    <a:lstStyle/>
+                    <a:p>
+                      <a:pPr marL="182880" algn="l" rtl="0" eaLnBrk="1" latinLnBrk="0" hangingPunct="1">
+                        <a:buNone/>
+                      </a:pPr>
+                      <a:r>
+                        <a:rPr lang="en-US" sz="900" kern="1200" dirty="0">
+                          <a:solidFill>
+                            <a:srgbClr val="48A0C7"/>
+                          </a:solidFill>
+                          <a:effectLst/>
+                        </a:rPr>
+                        <a:t>storage</a:t>
+                      </a:r>
+                      <a:endParaRPr lang="en-US" sz="900">
+                        <a:effectLst/>
+                      </a:endParaRPr>
+                    </a:p>
+                  </a:txBody>
+                  <a:tcPr marL="0" marR="0" marT="0" marB="0" anchor="ctr">
+                    <a:solidFill>
+                      <a:schemeClr val="bg1"/>
+                    </a:solidFill>
+                  </a:tcPr>
+                </a:tc>
+                <a:tc>
+                  <a:txBody>
+                    <a:bodyPr/>
+                    <a:lstStyle/>
+                    <a:p>
+                      <a:pPr marL="182880" algn="l" rtl="0" eaLnBrk="1" latinLnBrk="0" hangingPunct="1">
+                        <a:buNone/>
+                      </a:pPr>
+                      <a:r>
+                        <a:rPr lang="en-US" sz="900" kern="1200" dirty="0">
+                          <a:solidFill>
+                            <a:srgbClr val="48A0C7"/>
+                          </a:solidFill>
+                          <a:effectLst/>
+                        </a:rPr>
+                        <a:t>https://.../9x1-c2y</a:t>
+                      </a:r>
+                      <a:endParaRPr lang="en-US" sz="900" dirty="0">
+                        <a:effectLst/>
+                      </a:endParaRPr>
+                    </a:p>
+                  </a:txBody>
+                  <a:tcPr marL="0" marR="0" marT="0" marB="0" anchor="ctr">
+                    <a:solidFill>
+                      <a:schemeClr val="bg1"/>
+                    </a:solidFill>
+                  </a:tcPr>
+                </a:tc>
+                <a:tc>
+                  <a:txBody>
+                    <a:bodyPr/>
+                    <a:lstStyle/>
+                    <a:p>
+                      <a:pPr marL="182880" algn="l" rtl="0" eaLnBrk="1" latinLnBrk="0" hangingPunct="1">
+                        <a:buNone/>
+                      </a:pPr>
+                      <a:r>
+                        <a:rPr lang="en-US" sz="900" kern="1200" dirty="0">
+                          <a:solidFill>
+                            <a:srgbClr val="48A0C7"/>
+                          </a:solidFill>
+                          <a:effectLst/>
+                        </a:rPr>
+                        <a:t>https://.../f7g-0hi</a:t>
+                      </a:r>
+                      <a:endParaRPr lang="en-US" sz="900" dirty="0">
+                        <a:effectLst/>
+                      </a:endParaRPr>
+                    </a:p>
+                  </a:txBody>
+                  <a:tcPr marL="0" marR="0" marT="0" marB="0" anchor="ctr">
+                    <a:solidFill>
+                      <a:schemeClr val="bg1"/>
+                    </a:solidFill>
+                  </a:tcPr>
+                </a:tc>
+                <a:tc>
+                  <a:txBody>
+                    <a:bodyPr/>
+                    <a:lstStyle/>
+                    <a:p>
+                      <a:pPr marL="182880" algn="l" rtl="0" eaLnBrk="1" latinLnBrk="0" hangingPunct="1">
+                        <a:buNone/>
+                      </a:pPr>
+                      <a:r>
+                        <a:rPr lang="en-US" sz="900" b="0" kern="1200" dirty="0">
+                          <a:solidFill>
+                            <a:srgbClr val="48A0C7"/>
+                          </a:solidFill>
+                          <a:effectLst/>
+                        </a:rPr>
+                        <a:t>e7a3c91...4b6f2d5</a:t>
+                      </a:r>
+                      <a:endParaRPr lang="en-US" sz="900" b="0">
+                        <a:effectLst/>
+                      </a:endParaRPr>
+                    </a:p>
+                  </a:txBody>
+                  <a:tcPr marL="0" marR="0" marT="0" marB="0" anchor="ctr">
+                    <a:solidFill>
+                      <a:schemeClr val="bg1"/>
+                    </a:solidFill>
+                  </a:tcPr>
+                </a:tc>
+                <a:extLst>
+                  <a:ext uri="{0D108BD9-81ED-4DB2-BD59-A6C34878D82A}">
+                    <a16:rowId xmlns:a16="http://schemas.microsoft.com/office/drawing/2014/main" val="3975126034"/>
+                  </a:ext>
+                </a:extLst>
+              </a:tr>
+              <a:tr h="470892">
+                <a:tc>
+                  <a:txBody>
+                    <a:bodyPr/>
+                    <a:lstStyle/>
+                    <a:p>
+                      <a:pPr marL="182880" algn="l" rtl="0" eaLnBrk="1" latinLnBrk="0" hangingPunct="1">
+                        <a:buNone/>
+                      </a:pPr>
+                      <a:r>
+                        <a:rPr lang="en-US" sz="900" kern="1200" dirty="0">
+                          <a:solidFill>
+                            <a:srgbClr val="48A0C7"/>
+                          </a:solidFill>
+                          <a:effectLst/>
+                        </a:rPr>
+                        <a:t>network</a:t>
+                      </a:r>
+                      <a:endParaRPr lang="en-US" sz="900" dirty="0">
+                        <a:effectLst/>
+                      </a:endParaRPr>
+                    </a:p>
+                  </a:txBody>
+                  <a:tcPr marL="0" marR="0" marT="0" marB="0" anchor="ctr">
+                    <a:solidFill>
+                      <a:schemeClr val="bg1">
+                        <a:lumMod val="95000"/>
+                      </a:schemeClr>
+                    </a:solidFill>
+                  </a:tcPr>
+                </a:tc>
+                <a:tc>
+                  <a:txBody>
+                    <a:bodyPr/>
+                    <a:lstStyle/>
+                    <a:p>
+                      <a:pPr marL="182880" algn="l" rtl="0" eaLnBrk="1" latinLnBrk="0" hangingPunct="1">
+                        <a:buNone/>
+                      </a:pPr>
+                      <a:r>
+                        <a:rPr lang="en-US" sz="900" kern="1200" dirty="0">
+                          <a:solidFill>
+                            <a:srgbClr val="48A0C7"/>
+                          </a:solidFill>
+                          <a:effectLst/>
+                        </a:rPr>
+                        <a:t>https://.../d8f-3gh</a:t>
+                      </a:r>
+                      <a:endParaRPr lang="en-US" sz="900" dirty="0">
+                        <a:effectLst/>
+                      </a:endParaRPr>
+                    </a:p>
+                  </a:txBody>
+                  <a:tcPr marL="0" marR="0" marT="0" marB="0" anchor="ctr">
+                    <a:solidFill>
+                      <a:schemeClr val="bg1">
+                        <a:lumMod val="95000"/>
+                      </a:schemeClr>
+                    </a:solidFill>
+                  </a:tcPr>
+                </a:tc>
+                <a:tc>
+                  <a:txBody>
+                    <a:bodyPr/>
+                    <a:lstStyle/>
+                    <a:p>
+                      <a:pPr marL="182880" algn="l" rtl="0" eaLnBrk="1" latinLnBrk="0" hangingPunct="1">
+                        <a:buNone/>
+                      </a:pPr>
+                      <a:r>
+                        <a:rPr lang="en-US" sz="900" kern="1200" dirty="0">
+                          <a:solidFill>
+                            <a:srgbClr val="48A0C7"/>
+                          </a:solidFill>
+                          <a:effectLst/>
+                        </a:rPr>
+                        <a:t>https://.../k4l-8mn</a:t>
+                      </a:r>
+                      <a:endParaRPr lang="en-US" sz="900" dirty="0">
+                        <a:effectLst/>
+                      </a:endParaRPr>
+                    </a:p>
+                  </a:txBody>
+                  <a:tcPr marL="0" marR="0" marT="0" marB="0" anchor="ctr">
+                    <a:solidFill>
+                      <a:schemeClr val="bg1">
+                        <a:lumMod val="95000"/>
+                      </a:schemeClr>
+                    </a:solidFill>
+                  </a:tcPr>
+                </a:tc>
+                <a:tc>
+                  <a:txBody>
+                    <a:bodyPr/>
+                    <a:lstStyle/>
+                    <a:p>
+                      <a:pPr marL="182880" algn="l" rtl="0" eaLnBrk="1" latinLnBrk="0" hangingPunct="1">
+                        <a:buNone/>
+                      </a:pPr>
+                      <a:r>
+                        <a:rPr lang="en-US" sz="900" b="0" kern="1200" dirty="0">
+                          <a:solidFill>
+                            <a:srgbClr val="48A0C7"/>
+                          </a:solidFill>
+                          <a:effectLst/>
+                        </a:rPr>
+                        <a:t>2b9d6f4...8e1a3c7</a:t>
+                      </a:r>
+                      <a:endParaRPr lang="en-US" sz="900" b="0">
+                        <a:effectLst/>
+                      </a:endParaRPr>
+                    </a:p>
+                  </a:txBody>
+                  <a:tcPr marL="0" marR="0" marT="0" marB="0" anchor="ctr">
+                    <a:solidFill>
+                      <a:schemeClr val="bg1">
+                        <a:lumMod val="95000"/>
+                      </a:schemeClr>
+                    </a:solidFill>
+                  </a:tcPr>
+                </a:tc>
+                <a:extLst>
+                  <a:ext uri="{0D108BD9-81ED-4DB2-BD59-A6C34878D82A}">
+                    <a16:rowId xmlns:a16="http://schemas.microsoft.com/office/drawing/2014/main" val="4055790202"/>
+                  </a:ext>
+                </a:extLst>
+              </a:tr>
+            </a:tbl>
+          </a:graphicData>
+        </a:graphic>
+      </p:graphicFrame>
+      <p:sp>
+        <p:nvSpPr>
+          <p:cNvPr id="10" name="Google Shape;61;p4">
+            <a:extLst>
+              <a:ext uri="{FF2B5EF4-FFF2-40B4-BE49-F238E27FC236}">
+                <a16:creationId xmlns:a16="http://schemas.microsoft.com/office/drawing/2014/main" id="{C1B53E73-897D-099E-D45D-0F885A98462C}"/>
+              </a:ext>
+            </a:extLst>
+          </p:cNvPr>
+          <p:cNvSpPr txBox="1">
+            <a:spLocks/>
+          </p:cNvSpPr>
+          <p:nvPr/>
+        </p:nvSpPr>
+        <p:spPr>
+          <a:xfrm>
+            <a:off x="311700" y="1152475"/>
+            <a:ext cx="3999900" cy="3317400"/>
+          </a:xfrm>
+          <a:prstGeom prst="rect">
+            <a:avLst/>
+          </a:prstGeom>
+          <a:noFill/>
+          <a:ln>
+            <a:noFill/>
+          </a:ln>
+        </p:spPr>
+        <p:txBody>
+          <a:bodyPr spcFirstLastPara="1" wrap="square" lIns="91425" tIns="91425" rIns="91425" bIns="91425" anchor="t" anchorCtr="0">
+            <a:normAutofit/>
+          </a:bodyPr>
+          <a:lstStyle>
+            <a:defPPr marR="0" lvl="0" algn="l" rtl="0">
+              <a:lnSpc>
+                <a:spcPct val="100000"/>
+              </a:lnSpc>
+              <a:spcBef>
+                <a:spcPts val="0"/>
+              </a:spcBef>
+              <a:spcAft>
+                <a:spcPts val="0"/>
+              </a:spcAft>
+            </a:defPPr>
+            <a:lvl1pPr marL="457200" marR="0" lvl="0" indent="-317500" algn="l" rtl="0">
+              <a:lnSpc>
+                <a:spcPct val="115000"/>
+              </a:lnSpc>
+              <a:spcBef>
+                <a:spcPts val="0"/>
+              </a:spcBef>
+              <a:spcAft>
+                <a:spcPts val="0"/>
+              </a:spcAft>
+              <a:buClr>
+                <a:srgbClr val="2F4858"/>
+              </a:buClr>
+              <a:buSzPts val="1400"/>
+              <a:buFont typeface="Open Sans"/>
+              <a:buChar char="●"/>
+              <a:defRPr sz="1400" b="0" i="0" u="none" strike="noStrike" cap="none">
+                <a:solidFill>
+                  <a:srgbClr val="2F4858"/>
+                </a:solidFill>
+                <a:latin typeface="Open Sans"/>
+                <a:ea typeface="Open Sans"/>
+                <a:cs typeface="Open Sans"/>
+                <a:sym typeface="Open Sans"/>
+              </a:defRPr>
+            </a:lvl1pPr>
+            <a:lvl2pPr marL="914400" marR="0" lvl="1" indent="-304800" algn="l" rtl="0">
+              <a:lnSpc>
+                <a:spcPct val="115000"/>
+              </a:lnSpc>
+              <a:spcBef>
+                <a:spcPts val="0"/>
+              </a:spcBef>
+              <a:spcAft>
+                <a:spcPts val="0"/>
+              </a:spcAft>
+              <a:buClr>
+                <a:srgbClr val="2F4858"/>
+              </a:buClr>
+              <a:buSzPts val="1200"/>
+              <a:buFont typeface="Open Sans"/>
+              <a:buChar char="○"/>
+              <a:defRPr sz="1200" b="0" i="0" u="none" strike="noStrike" cap="none">
+                <a:solidFill>
+                  <a:srgbClr val="2F4858"/>
+                </a:solidFill>
+                <a:latin typeface="Open Sans"/>
+                <a:ea typeface="Open Sans"/>
+                <a:cs typeface="Open Sans"/>
+                <a:sym typeface="Open Sans"/>
+              </a:defRPr>
+            </a:lvl2pPr>
+            <a:lvl3pPr marL="1371600" marR="0" lvl="2" indent="-304800" algn="l" rtl="0">
+              <a:lnSpc>
+                <a:spcPct val="115000"/>
+              </a:lnSpc>
+              <a:spcBef>
+                <a:spcPts val="0"/>
+              </a:spcBef>
+              <a:spcAft>
+                <a:spcPts val="0"/>
+              </a:spcAft>
+              <a:buClr>
+                <a:srgbClr val="2F4858"/>
+              </a:buClr>
+              <a:buSzPts val="1200"/>
+              <a:buFont typeface="Open Sans"/>
+              <a:buChar char="■"/>
+              <a:defRPr sz="1200" b="0" i="0" u="none" strike="noStrike" cap="none">
+                <a:solidFill>
+                  <a:srgbClr val="2F4858"/>
+                </a:solidFill>
+                <a:latin typeface="Open Sans"/>
+                <a:ea typeface="Open Sans"/>
+                <a:cs typeface="Open Sans"/>
+                <a:sym typeface="Open Sans"/>
+              </a:defRPr>
+            </a:lvl3pPr>
+            <a:lvl4pPr marL="1828800" marR="0" lvl="3" indent="-304800" algn="l" rtl="0">
+              <a:lnSpc>
+                <a:spcPct val="115000"/>
+              </a:lnSpc>
+              <a:spcBef>
+                <a:spcPts val="0"/>
+              </a:spcBef>
+              <a:spcAft>
+                <a:spcPts val="0"/>
+              </a:spcAft>
+              <a:buClr>
+                <a:srgbClr val="2F4858"/>
+              </a:buClr>
+              <a:buSzPts val="1200"/>
+              <a:buFont typeface="Open Sans"/>
+              <a:buChar char="●"/>
+              <a:defRPr sz="1200" b="0" i="0" u="none" strike="noStrike" cap="none">
+                <a:solidFill>
+                  <a:srgbClr val="2F4858"/>
+                </a:solidFill>
+                <a:latin typeface="Open Sans"/>
+                <a:ea typeface="Open Sans"/>
+                <a:cs typeface="Open Sans"/>
+                <a:sym typeface="Open Sans"/>
+              </a:defRPr>
+            </a:lvl4pPr>
+            <a:lvl5pPr marL="2286000" marR="0" lvl="4" indent="-304800" algn="l" rtl="0">
+              <a:lnSpc>
+                <a:spcPct val="115000"/>
+              </a:lnSpc>
+              <a:spcBef>
+                <a:spcPts val="0"/>
+              </a:spcBef>
+              <a:spcAft>
+                <a:spcPts val="0"/>
+              </a:spcAft>
+              <a:buClr>
+                <a:srgbClr val="2F4858"/>
+              </a:buClr>
+              <a:buSzPts val="1200"/>
+              <a:buFont typeface="Open Sans"/>
+              <a:buChar char="○"/>
+              <a:defRPr sz="1200" b="0" i="0" u="none" strike="noStrike" cap="none">
+                <a:solidFill>
+                  <a:srgbClr val="2F4858"/>
+                </a:solidFill>
+                <a:latin typeface="Open Sans"/>
+                <a:ea typeface="Open Sans"/>
+                <a:cs typeface="Open Sans"/>
+                <a:sym typeface="Open Sans"/>
+              </a:defRPr>
+            </a:lvl5pPr>
+            <a:lvl6pPr marL="2743200" marR="0" lvl="5" indent="-304800" algn="l" rtl="0">
+              <a:lnSpc>
+                <a:spcPct val="115000"/>
+              </a:lnSpc>
+              <a:spcBef>
+                <a:spcPts val="0"/>
+              </a:spcBef>
+              <a:spcAft>
+                <a:spcPts val="0"/>
+              </a:spcAft>
+              <a:buClr>
+                <a:srgbClr val="2F4858"/>
+              </a:buClr>
+              <a:buSzPts val="1200"/>
+              <a:buFont typeface="Open Sans"/>
+              <a:buChar char="■"/>
+              <a:defRPr sz="1200" b="0" i="0" u="none" strike="noStrike" cap="none">
+                <a:solidFill>
+                  <a:srgbClr val="2F4858"/>
+                </a:solidFill>
+                <a:latin typeface="Open Sans"/>
+                <a:ea typeface="Open Sans"/>
+                <a:cs typeface="Open Sans"/>
+                <a:sym typeface="Open Sans"/>
+              </a:defRPr>
+            </a:lvl6pPr>
+            <a:lvl7pPr marL="3200400" marR="0" lvl="6" indent="-304800" algn="l" rtl="0">
+              <a:lnSpc>
+                <a:spcPct val="115000"/>
+              </a:lnSpc>
+              <a:spcBef>
+                <a:spcPts val="0"/>
+              </a:spcBef>
+              <a:spcAft>
+                <a:spcPts val="0"/>
+              </a:spcAft>
+              <a:buClr>
+                <a:srgbClr val="2F4858"/>
+              </a:buClr>
+              <a:buSzPts val="1200"/>
+              <a:buFont typeface="Open Sans"/>
+              <a:buChar char="●"/>
+              <a:defRPr sz="1200" b="0" i="0" u="none" strike="noStrike" cap="none">
+                <a:solidFill>
+                  <a:srgbClr val="2F4858"/>
+                </a:solidFill>
+                <a:latin typeface="Open Sans"/>
+                <a:ea typeface="Open Sans"/>
+                <a:cs typeface="Open Sans"/>
+                <a:sym typeface="Open Sans"/>
+              </a:defRPr>
+            </a:lvl7pPr>
+            <a:lvl8pPr marL="3657600" marR="0" lvl="7" indent="-304800" algn="l" rtl="0">
+              <a:lnSpc>
+                <a:spcPct val="115000"/>
+              </a:lnSpc>
+              <a:spcBef>
+                <a:spcPts val="0"/>
+              </a:spcBef>
+              <a:spcAft>
+                <a:spcPts val="0"/>
+              </a:spcAft>
+              <a:buClr>
+                <a:srgbClr val="2F4858"/>
+              </a:buClr>
+              <a:buSzPts val="1200"/>
+              <a:buFont typeface="Open Sans"/>
+              <a:buChar char="○"/>
+              <a:defRPr sz="1200" b="0" i="0" u="none" strike="noStrike" cap="none">
+                <a:solidFill>
+                  <a:srgbClr val="2F4858"/>
+                </a:solidFill>
+                <a:latin typeface="Open Sans"/>
+                <a:ea typeface="Open Sans"/>
+                <a:cs typeface="Open Sans"/>
+                <a:sym typeface="Open Sans"/>
+              </a:defRPr>
+            </a:lvl8pPr>
+            <a:lvl9pPr marL="4114800" marR="0" lvl="8" indent="-304800" algn="l" rtl="0">
+              <a:lnSpc>
+                <a:spcPct val="115000"/>
+              </a:lnSpc>
+              <a:spcBef>
+                <a:spcPts val="0"/>
+              </a:spcBef>
+              <a:spcAft>
+                <a:spcPts val="0"/>
+              </a:spcAft>
+              <a:buClr>
+                <a:srgbClr val="2F4858"/>
+              </a:buClr>
+              <a:buSzPts val="1200"/>
+              <a:buFont typeface="Open Sans"/>
+              <a:buChar char="■"/>
+              <a:defRPr sz="1200" b="0" i="0" u="none" strike="noStrike" cap="none">
+                <a:solidFill>
+                  <a:srgbClr val="2F4858"/>
+                </a:solidFill>
+                <a:latin typeface="Open Sans"/>
+                <a:ea typeface="Open Sans"/>
+                <a:cs typeface="Open Sans"/>
+                <a:sym typeface="Open Sans"/>
+              </a:defRPr>
+            </a:lvl9pPr>
+          </a:lstStyle>
+          <a:p>
+            <a:pPr marL="514350" indent="-285750">
+              <a:lnSpc>
+                <a:spcPct val="114999"/>
+              </a:lnSpc>
+            </a:pPr>
+            <a:r>
+              <a:rPr lang="en-US" sz="1600" dirty="0"/>
+              <a:t>Catalogs diff – enabled us to do Git bisect type operations when debugging regressions</a:t>
+            </a:r>
+            <a:endParaRPr lang="en-US" sz="1600" dirty="0">
+              <a:solidFill>
+                <a:srgbClr val="000000"/>
+              </a:solidFill>
+            </a:endParaRPr>
+          </a:p>
+          <a:p>
+            <a:pPr marL="514350" indent="-285750">
+              <a:lnSpc>
+                <a:spcPct val="114999"/>
+              </a:lnSpc>
+            </a:pPr>
+            <a:r>
+              <a:rPr lang="en-US" sz="1600" dirty="0"/>
+              <a:t>Implemented simple build cache – Lookup Git commit of latest CICD build and skip the build if commit hasn’t changed, which is faster than Docker cache mechanisms</a:t>
+            </a:r>
+            <a:endParaRPr lang="en-US" sz="1600" dirty="0">
+              <a:solidFill>
+                <a:srgbClr val="000000"/>
+              </a:solidFill>
+            </a:endParaRPr>
+          </a:p>
+          <a:p>
+            <a:pPr indent="-228600">
+              <a:lnSpc>
+                <a:spcPct val="114999"/>
+              </a:lnSpc>
+              <a:buFont typeface="Open Sans"/>
+              <a:buNone/>
+            </a:pPr>
+            <a:endParaRPr lang="en-US" sz="1600" dirty="0"/>
+          </a:p>
+        </p:txBody>
+      </p:sp>
+    </p:spTree>
+    <p:extLst>
+      <p:ext uri="{BB962C8B-B14F-4D97-AF65-F5344CB8AC3E}">
+        <p14:creationId xmlns:p14="http://schemas.microsoft.com/office/powerpoint/2010/main" val="2848597407"/>
+      </p:ext>
+    </p:extLst>
+  </p:cSld>
+  <p:clrMapOvr>
+    <a:masterClrMapping/>
+  </p:clrMapOvr>
+</p:sld>
+</file>
+
+<file path=ppt/slides/slide5.xml><?xml version="1.0" encoding="utf-8"?>
+<p:sld xmlns:a="http://schemas.openxmlformats.org/drawingml/2006/main" xmlns:r="http://schemas.openxmlformats.org/officeDocument/2006/relationships" xmlns:p="http://schemas.openxmlformats.org/presentationml/2006/main">
+  <p:cSld>
+    <p:spTree>
+      <p:nvGrpSpPr>
+        <p:cNvPr id="1" name="Shape 59">
+          <a:extLst>
+            <a:ext uri="{FF2B5EF4-FFF2-40B4-BE49-F238E27FC236}">
+              <a16:creationId xmlns:a16="http://schemas.microsoft.com/office/drawing/2014/main" id="{9B9C8174-8E14-920A-C4AC-D50C7A922059}"/>
+            </a:ext>
+          </a:extLst>
+        </p:cNvPr>
+        <p:cNvGrpSpPr/>
+        <p:nvPr/>
+      </p:nvGrpSpPr>
+      <p:grpSpPr>
+        <a:xfrm>
+          <a:off x="0" y="0"/>
+          <a:ext cx="0" cy="0"/>
+          <a:chOff x="0" y="0"/>
+          <a:chExt cx="0" cy="0"/>
+        </a:xfrm>
+      </p:grpSpPr>
+      <p:sp>
+        <p:nvSpPr>
+          <p:cNvPr id="60" name="Google Shape;60;p4">
+            <a:extLst>
+              <a:ext uri="{FF2B5EF4-FFF2-40B4-BE49-F238E27FC236}">
+                <a16:creationId xmlns:a16="http://schemas.microsoft.com/office/drawing/2014/main" id="{078A5EE4-3BC7-BDDE-0A82-30D65B424EFD}"/>
+              </a:ext>
+            </a:extLst>
+          </p:cNvPr>
+          <p:cNvSpPr txBox="1">
+            <a:spLocks noGrp="1"/>
+          </p:cNvSpPr>
+          <p:nvPr>
+            <p:ph type="title"/>
+          </p:nvPr>
+        </p:nvSpPr>
+        <p:spPr>
+          <a:xfrm>
+            <a:off x="311700" y="445025"/>
+            <a:ext cx="8520600" cy="572700"/>
+          </a:xfrm>
+          <a:prstGeom prst="rect">
+            <a:avLst/>
+          </a:prstGeom>
+          <a:noFill/>
+          <a:ln>
+            <a:noFill/>
+          </a:ln>
+        </p:spPr>
+        <p:txBody>
+          <a:bodyPr spcFirstLastPara="1" wrap="square" lIns="91425" tIns="91425" rIns="91425" bIns="91425" anchor="t" anchorCtr="0">
+            <a:normAutofit fontScale="90000"/>
+          </a:bodyPr>
+          <a:lstStyle/>
+          <a:p>
+            <a:r>
+              <a:rPr lang="en-US" dirty="0"/>
+              <a:t>Portable Feature Flags</a:t>
             </a:r>
           </a:p>
         </p:txBody>
       </p:sp>
       <p:sp>
         <p:nvSpPr>
-          <p:cNvPr id="55" name="Google Shape;55;g31b75ad4c98_0_0">
+          <p:cNvPr id="61" name="Google Shape;61;p4">
             <a:extLst>
               <a:ext uri="{FF2B5EF4-FFF2-40B4-BE49-F238E27FC236}">
-                <a16:creationId xmlns:a16="http://schemas.microsoft.com/office/drawing/2014/main" id="{B3431829-4278-F70B-1D0C-9EE954C02483}"/>
+                <a16:creationId xmlns:a16="http://schemas.microsoft.com/office/drawing/2014/main" id="{9CD4349F-D645-5D5F-4120-F396A9C75F0D}"/>
               </a:ext>
             </a:extLst>
           </p:cNvPr>
@@ -7018,7 +8602,7 @@
         <p:spPr>
           <a:xfrm>
             <a:off x="311700" y="1152475"/>
-            <a:ext cx="8520600" cy="3317400"/>
+            <a:ext cx="3999900" cy="3317400"/>
           </a:xfrm>
           <a:prstGeom prst="rect">
             <a:avLst/>
@@ -7034,28 +8618,15 @@
           </a:bodyPr>
           <a:lstStyle/>
           <a:p>
-            <a:pPr marL="514350" indent="-285750"/>
-            <a:r>
-              <a:rPr lang="en-US" sz="1600" dirty="0"/>
-              <a:t>Catalogs diff – enabled us to do Git bisect type operations when debugging regressions</a:t>
-            </a:r>
-          </a:p>
-          <a:p>
-            <a:pPr marL="514350" indent="-285750"/>
-            <a:r>
-              <a:rPr lang="en-US" sz="1600" dirty="0"/>
-              <a:t>Implemented simple build cache – Simpler builds lookup Git commit of latest CICD build and skip the build if commit hasn’t changed, which is faster than Docker cache mechanisms, saving us money</a:t>
-            </a:r>
-          </a:p>
-          <a:p>
-            <a:pPr marL="514350" indent="-285750">
+            <a:pPr marL="228600" indent="0">
               <a:lnSpc>
                 <a:spcPct val="114999"/>
               </a:lnSpc>
+              <a:buNone/>
             </a:pPr>
             <a:r>
               <a:rPr lang="en-US" sz="1600" dirty="0"/>
-              <a:t>Portable feature flags - Enhanced our </a:t>
+              <a:t>Enhanced our </a:t>
             </a:r>
             <a:r>
               <a:rPr lang="en-US" sz="1600" dirty="0" err="1"/>
@@ -7063,7 +8634,23 @@
             </a:r>
             <a:r>
               <a:rPr lang="en-US" sz="1600" dirty="0"/>
-              <a:t> orchestration</a:t>
+              <a:t> orchestration.  Some examples:</a:t>
+            </a:r>
+            <a:endParaRPr lang="en-US" sz="1600" dirty="0">
+              <a:solidFill>
+                <a:srgbClr val="000000"/>
+              </a:solidFill>
+            </a:endParaRPr>
+          </a:p>
+          <a:p>
+            <a:pPr marL="514350" indent="-285750">
+              <a:lnSpc>
+                <a:spcPct val="114999"/>
+              </a:lnSpc>
+            </a:pPr>
+            <a:r>
+              <a:rPr lang="en-US" sz="1600" dirty="0"/>
+              <a:t>Cluster deployment is chosen based on version in image</a:t>
             </a:r>
           </a:p>
           <a:p>
@@ -7074,7 +8661,7 @@
             </a:pPr>
             <a:r>
               <a:rPr lang="en-US" sz="1600" dirty="0"/>
-              <a:t>Reduced user error on our end-user automation since the artifact already contained many of the parameters needed</a:t>
+              <a:t>Mirror the appropriate versions of services</a:t>
             </a:r>
           </a:p>
           <a:p>
@@ -7083,22 +8670,733 @@
                 <a:spcPct val="114999"/>
               </a:lnSpc>
             </a:pPr>
+            <a:r>
+              <a:rPr lang="en-US" sz="1600" dirty="0"/>
+              <a:t>Trigger different test suites if this is a hotfix image</a:t>
+            </a:r>
+          </a:p>
+          <a:p>
+            <a:pPr marL="514350" indent="-285750">
+              <a:lnSpc>
+                <a:spcPct val="114999"/>
+              </a:lnSpc>
+            </a:pPr>
             <a:endParaRPr lang="en-US" sz="1600" dirty="0"/>
           </a:p>
+        </p:txBody>
+      </p:sp>
+      <p:pic>
+        <p:nvPicPr>
+          <p:cNvPr id="3" name="Picture 2">
+            <a:extLst>
+              <a:ext uri="{FF2B5EF4-FFF2-40B4-BE49-F238E27FC236}">
+                <a16:creationId xmlns:a16="http://schemas.microsoft.com/office/drawing/2014/main" id="{35F9B3B6-8B02-1184-C3AB-0A0FB5A2D419}"/>
+              </a:ext>
+            </a:extLst>
+          </p:cNvPr>
+          <p:cNvPicPr>
+            <a:picLocks noChangeAspect="1"/>
+          </p:cNvPicPr>
+          <p:nvPr/>
+        </p:nvPicPr>
+        <p:blipFill>
+          <a:blip r:embed="rId3"/>
+          <a:stretch>
+            <a:fillRect/>
+          </a:stretch>
+        </p:blipFill>
+        <p:spPr>
+          <a:xfrm>
+            <a:off x="8290152" y="4520972"/>
+            <a:ext cx="540885" cy="540885"/>
+          </a:xfrm>
+          <a:prstGeom prst="rect">
+            <a:avLst/>
+          </a:prstGeom>
+        </p:spPr>
+      </p:pic>
+      <p:sp>
+        <p:nvSpPr>
+          <p:cNvPr id="6" name="Google Shape;62;p4">
+            <a:extLst>
+              <a:ext uri="{FF2B5EF4-FFF2-40B4-BE49-F238E27FC236}">
+                <a16:creationId xmlns:a16="http://schemas.microsoft.com/office/drawing/2014/main" id="{F9CE0D61-48EC-BCC9-E751-C99DE9DCDFF4}"/>
+              </a:ext>
+            </a:extLst>
+          </p:cNvPr>
+          <p:cNvSpPr txBox="1">
+            <a:spLocks/>
+          </p:cNvSpPr>
+          <p:nvPr/>
+        </p:nvSpPr>
+        <p:spPr>
+          <a:xfrm>
+            <a:off x="4832400" y="1152475"/>
+            <a:ext cx="3904649" cy="2354695"/>
+          </a:xfrm>
+          <a:prstGeom prst="rect">
+            <a:avLst/>
+          </a:prstGeom>
+          <a:solidFill>
+            <a:schemeClr val="tx1"/>
+          </a:solidFill>
+          <a:ln>
+            <a:noFill/>
+          </a:ln>
+        </p:spPr>
+        <p:txBody>
+          <a:bodyPr spcFirstLastPara="1" wrap="square" lIns="91425" tIns="91425" rIns="91425" bIns="91425" anchor="t" anchorCtr="0">
+            <a:normAutofit lnSpcReduction="10000"/>
+          </a:bodyPr>
+          <a:lstStyle>
+            <a:defPPr marR="0" lvl="0" algn="l" rtl="0">
+              <a:lnSpc>
+                <a:spcPct val="100000"/>
+              </a:lnSpc>
+              <a:spcBef>
+                <a:spcPts val="0"/>
+              </a:spcBef>
+              <a:spcAft>
+                <a:spcPts val="0"/>
+              </a:spcAft>
+            </a:defPPr>
+            <a:lvl1pPr marL="457200" marR="0" lvl="0" indent="-317500" algn="l" rtl="0">
+              <a:lnSpc>
+                <a:spcPct val="115000"/>
+              </a:lnSpc>
+              <a:spcBef>
+                <a:spcPts val="0"/>
+              </a:spcBef>
+              <a:spcAft>
+                <a:spcPts val="0"/>
+              </a:spcAft>
+              <a:buClr>
+                <a:srgbClr val="2F4858"/>
+              </a:buClr>
+              <a:buSzPts val="1400"/>
+              <a:buFont typeface="Open Sans"/>
+              <a:buChar char="●"/>
+              <a:defRPr sz="1400" b="0" i="0" u="none" strike="noStrike" cap="none">
+                <a:solidFill>
+                  <a:srgbClr val="2F4858"/>
+                </a:solidFill>
+                <a:latin typeface="Open Sans"/>
+                <a:ea typeface="Open Sans"/>
+                <a:cs typeface="Open Sans"/>
+                <a:sym typeface="Open Sans"/>
+              </a:defRPr>
+            </a:lvl1pPr>
+            <a:lvl2pPr marL="914400" marR="0" lvl="1" indent="-304800" algn="l" rtl="0">
+              <a:lnSpc>
+                <a:spcPct val="115000"/>
+              </a:lnSpc>
+              <a:spcBef>
+                <a:spcPts val="0"/>
+              </a:spcBef>
+              <a:spcAft>
+                <a:spcPts val="0"/>
+              </a:spcAft>
+              <a:buClr>
+                <a:srgbClr val="2F4858"/>
+              </a:buClr>
+              <a:buSzPts val="1200"/>
+              <a:buFont typeface="Open Sans"/>
+              <a:buChar char="○"/>
+              <a:defRPr sz="1200" b="0" i="0" u="none" strike="noStrike" cap="none">
+                <a:solidFill>
+                  <a:srgbClr val="2F4858"/>
+                </a:solidFill>
+                <a:latin typeface="Open Sans"/>
+                <a:ea typeface="Open Sans"/>
+                <a:cs typeface="Open Sans"/>
+                <a:sym typeface="Open Sans"/>
+              </a:defRPr>
+            </a:lvl2pPr>
+            <a:lvl3pPr marL="1371600" marR="0" lvl="2" indent="-304800" algn="l" rtl="0">
+              <a:lnSpc>
+                <a:spcPct val="115000"/>
+              </a:lnSpc>
+              <a:spcBef>
+                <a:spcPts val="0"/>
+              </a:spcBef>
+              <a:spcAft>
+                <a:spcPts val="0"/>
+              </a:spcAft>
+              <a:buClr>
+                <a:srgbClr val="2F4858"/>
+              </a:buClr>
+              <a:buSzPts val="1200"/>
+              <a:buFont typeface="Open Sans"/>
+              <a:buChar char="■"/>
+              <a:defRPr sz="1200" b="0" i="0" u="none" strike="noStrike" cap="none">
+                <a:solidFill>
+                  <a:srgbClr val="2F4858"/>
+                </a:solidFill>
+                <a:latin typeface="Open Sans"/>
+                <a:ea typeface="Open Sans"/>
+                <a:cs typeface="Open Sans"/>
+                <a:sym typeface="Open Sans"/>
+              </a:defRPr>
+            </a:lvl3pPr>
+            <a:lvl4pPr marL="1828800" marR="0" lvl="3" indent="-304800" algn="l" rtl="0">
+              <a:lnSpc>
+                <a:spcPct val="115000"/>
+              </a:lnSpc>
+              <a:spcBef>
+                <a:spcPts val="0"/>
+              </a:spcBef>
+              <a:spcAft>
+                <a:spcPts val="0"/>
+              </a:spcAft>
+              <a:buClr>
+                <a:srgbClr val="2F4858"/>
+              </a:buClr>
+              <a:buSzPts val="1200"/>
+              <a:buFont typeface="Open Sans"/>
+              <a:buChar char="●"/>
+              <a:defRPr sz="1200" b="0" i="0" u="none" strike="noStrike" cap="none">
+                <a:solidFill>
+                  <a:srgbClr val="2F4858"/>
+                </a:solidFill>
+                <a:latin typeface="Open Sans"/>
+                <a:ea typeface="Open Sans"/>
+                <a:cs typeface="Open Sans"/>
+                <a:sym typeface="Open Sans"/>
+              </a:defRPr>
+            </a:lvl4pPr>
+            <a:lvl5pPr marL="2286000" marR="0" lvl="4" indent="-304800" algn="l" rtl="0">
+              <a:lnSpc>
+                <a:spcPct val="115000"/>
+              </a:lnSpc>
+              <a:spcBef>
+                <a:spcPts val="0"/>
+              </a:spcBef>
+              <a:spcAft>
+                <a:spcPts val="0"/>
+              </a:spcAft>
+              <a:buClr>
+                <a:srgbClr val="2F4858"/>
+              </a:buClr>
+              <a:buSzPts val="1200"/>
+              <a:buFont typeface="Open Sans"/>
+              <a:buChar char="○"/>
+              <a:defRPr sz="1200" b="0" i="0" u="none" strike="noStrike" cap="none">
+                <a:solidFill>
+                  <a:srgbClr val="2F4858"/>
+                </a:solidFill>
+                <a:latin typeface="Open Sans"/>
+                <a:ea typeface="Open Sans"/>
+                <a:cs typeface="Open Sans"/>
+                <a:sym typeface="Open Sans"/>
+              </a:defRPr>
+            </a:lvl5pPr>
+            <a:lvl6pPr marL="2743200" marR="0" lvl="5" indent="-304800" algn="l" rtl="0">
+              <a:lnSpc>
+                <a:spcPct val="115000"/>
+              </a:lnSpc>
+              <a:spcBef>
+                <a:spcPts val="0"/>
+              </a:spcBef>
+              <a:spcAft>
+                <a:spcPts val="0"/>
+              </a:spcAft>
+              <a:buClr>
+                <a:srgbClr val="2F4858"/>
+              </a:buClr>
+              <a:buSzPts val="1200"/>
+              <a:buFont typeface="Open Sans"/>
+              <a:buChar char="■"/>
+              <a:defRPr sz="1200" b="0" i="0" u="none" strike="noStrike" cap="none">
+                <a:solidFill>
+                  <a:srgbClr val="2F4858"/>
+                </a:solidFill>
+                <a:latin typeface="Open Sans"/>
+                <a:ea typeface="Open Sans"/>
+                <a:cs typeface="Open Sans"/>
+                <a:sym typeface="Open Sans"/>
+              </a:defRPr>
+            </a:lvl6pPr>
+            <a:lvl7pPr marL="3200400" marR="0" lvl="6" indent="-304800" algn="l" rtl="0">
+              <a:lnSpc>
+                <a:spcPct val="115000"/>
+              </a:lnSpc>
+              <a:spcBef>
+                <a:spcPts val="0"/>
+              </a:spcBef>
+              <a:spcAft>
+                <a:spcPts val="0"/>
+              </a:spcAft>
+              <a:buClr>
+                <a:srgbClr val="2F4858"/>
+              </a:buClr>
+              <a:buSzPts val="1200"/>
+              <a:buFont typeface="Open Sans"/>
+              <a:buChar char="●"/>
+              <a:defRPr sz="1200" b="0" i="0" u="none" strike="noStrike" cap="none">
+                <a:solidFill>
+                  <a:srgbClr val="2F4858"/>
+                </a:solidFill>
+                <a:latin typeface="Open Sans"/>
+                <a:ea typeface="Open Sans"/>
+                <a:cs typeface="Open Sans"/>
+                <a:sym typeface="Open Sans"/>
+              </a:defRPr>
+            </a:lvl7pPr>
+            <a:lvl8pPr marL="3657600" marR="0" lvl="7" indent="-304800" algn="l" rtl="0">
+              <a:lnSpc>
+                <a:spcPct val="115000"/>
+              </a:lnSpc>
+              <a:spcBef>
+                <a:spcPts val="0"/>
+              </a:spcBef>
+              <a:spcAft>
+                <a:spcPts val="0"/>
+              </a:spcAft>
+              <a:buClr>
+                <a:srgbClr val="2F4858"/>
+              </a:buClr>
+              <a:buSzPts val="1200"/>
+              <a:buFont typeface="Open Sans"/>
+              <a:buChar char="○"/>
+              <a:defRPr sz="1200" b="0" i="0" u="none" strike="noStrike" cap="none">
+                <a:solidFill>
+                  <a:srgbClr val="2F4858"/>
+                </a:solidFill>
+                <a:latin typeface="Open Sans"/>
+                <a:ea typeface="Open Sans"/>
+                <a:cs typeface="Open Sans"/>
+                <a:sym typeface="Open Sans"/>
+              </a:defRPr>
+            </a:lvl8pPr>
+            <a:lvl9pPr marL="4114800" marR="0" lvl="8" indent="-304800" algn="l" rtl="0">
+              <a:lnSpc>
+                <a:spcPct val="115000"/>
+              </a:lnSpc>
+              <a:spcBef>
+                <a:spcPts val="0"/>
+              </a:spcBef>
+              <a:spcAft>
+                <a:spcPts val="0"/>
+              </a:spcAft>
+              <a:buClr>
+                <a:srgbClr val="2F4858"/>
+              </a:buClr>
+              <a:buSzPts val="1200"/>
+              <a:buFont typeface="Open Sans"/>
+              <a:buChar char="■"/>
+              <a:defRPr sz="1200" b="0" i="0" u="none" strike="noStrike" cap="none">
+                <a:solidFill>
+                  <a:srgbClr val="2F4858"/>
+                </a:solidFill>
+                <a:latin typeface="Open Sans"/>
+                <a:ea typeface="Open Sans"/>
+                <a:cs typeface="Open Sans"/>
+                <a:sym typeface="Open Sans"/>
+              </a:defRPr>
+            </a:lvl9pPr>
+          </a:lstStyle>
           <a:p>
-            <a:pPr marL="514350" indent="-285750"/>
-            <a:endParaRPr lang="en-US" sz="1600" dirty="0"/>
+            <a:pPr marL="91440" indent="0">
+              <a:lnSpc>
+                <a:spcPct val="114999"/>
+              </a:lnSpc>
+              <a:buFont typeface="Open Sans"/>
+              <a:buNone/>
+            </a:pPr>
+            <a:r>
+              <a:rPr lang="en-US" sz="1200" b="1" dirty="0">
+                <a:solidFill>
+                  <a:schemeClr val="bg1"/>
+                </a:solidFill>
+                <a:latin typeface="Courier New"/>
+                <a:cs typeface="Courier New"/>
+              </a:rPr>
+              <a:t>{</a:t>
+            </a:r>
+            <a:endParaRPr lang="en-US" sz="1200" dirty="0">
+              <a:solidFill>
+                <a:schemeClr val="bg1"/>
+              </a:solidFill>
+              <a:latin typeface="Courier New"/>
+              <a:cs typeface="Courier New"/>
+            </a:endParaRPr>
           </a:p>
           <a:p>
-            <a:pPr marL="514350" indent="-285750"/>
-            <a:endParaRPr lang="en-US" sz="1600" dirty="0"/>
+            <a:pPr marL="91440" indent="0">
+              <a:lnSpc>
+                <a:spcPct val="114999"/>
+              </a:lnSpc>
+              <a:buFont typeface="Open Sans"/>
+              <a:buNone/>
+            </a:pPr>
+            <a:r>
+              <a:rPr lang="en-US" sz="1200" b="1" dirty="0">
+                <a:solidFill>
+                  <a:schemeClr val="bg1"/>
+                </a:solidFill>
+                <a:latin typeface="Courier New"/>
+                <a:cs typeface="Courier New"/>
+              </a:rPr>
+              <a:t>  ...</a:t>
+            </a:r>
+            <a:endParaRPr lang="en-US" sz="1200" dirty="0">
+              <a:solidFill>
+                <a:schemeClr val="bg1"/>
+              </a:solidFill>
+              <a:latin typeface="Courier New"/>
+              <a:cs typeface="Courier New"/>
+            </a:endParaRPr>
+          </a:p>
+          <a:p>
+            <a:pPr marL="91440" indent="0">
+              <a:lnSpc>
+                <a:spcPct val="114999"/>
+              </a:lnSpc>
+              <a:buFont typeface="Open Sans"/>
+              <a:buNone/>
+            </a:pPr>
+            <a:r>
+              <a:rPr lang="en-US" sz="1200" b="1" dirty="0">
+                <a:solidFill>
+                  <a:schemeClr val="bg1"/>
+                </a:solidFill>
+                <a:latin typeface="Courier New"/>
+                <a:cs typeface="Courier New"/>
+              </a:rPr>
+              <a:t>  "</a:t>
+            </a:r>
+            <a:r>
+              <a:rPr lang="en-US" sz="1200" b="1" dirty="0" err="1">
+                <a:solidFill>
+                  <a:schemeClr val="bg1"/>
+                </a:solidFill>
+                <a:latin typeface="Courier New"/>
+                <a:cs typeface="Courier New"/>
+              </a:rPr>
+              <a:t>isf.git_commit</a:t>
+            </a:r>
+            <a:r>
+              <a:rPr lang="en-US" sz="1200" b="1" dirty="0">
+                <a:solidFill>
+                  <a:schemeClr val="bg1"/>
+                </a:solidFill>
+                <a:latin typeface="Courier New"/>
+                <a:cs typeface="Courier New"/>
+              </a:rPr>
+              <a:t>": "3a97fb6",</a:t>
+            </a:r>
+            <a:endParaRPr lang="en-US" sz="1200" dirty="0">
+              <a:solidFill>
+                <a:schemeClr val="bg1"/>
+              </a:solidFill>
+              <a:latin typeface="Courier New"/>
+              <a:cs typeface="Courier New"/>
+            </a:endParaRPr>
+          </a:p>
+          <a:p>
+            <a:pPr marL="91440" indent="0">
+              <a:lnSpc>
+                <a:spcPct val="114999"/>
+              </a:lnSpc>
+              <a:buFont typeface="Open Sans"/>
+              <a:buNone/>
+            </a:pPr>
+            <a:r>
+              <a:rPr lang="en-US" sz="1200" b="1" dirty="0">
+                <a:solidFill>
+                  <a:schemeClr val="bg1"/>
+                </a:solidFill>
+                <a:latin typeface="Courier New"/>
+                <a:cs typeface="Courier New"/>
+              </a:rPr>
+              <a:t>  "</a:t>
+            </a:r>
+            <a:r>
+              <a:rPr lang="en-US" sz="1200" b="1" dirty="0" err="1">
+                <a:solidFill>
+                  <a:schemeClr val="bg1"/>
+                </a:solidFill>
+                <a:latin typeface="Courier New"/>
+                <a:cs typeface="Courier New"/>
+              </a:rPr>
+              <a:t>isf.version</a:t>
+            </a:r>
+            <a:r>
+              <a:rPr lang="en-US" sz="1200" b="1" dirty="0">
+                <a:solidFill>
+                  <a:schemeClr val="bg1"/>
+                </a:solidFill>
+                <a:latin typeface="Courier New"/>
+                <a:cs typeface="Courier New"/>
+              </a:rPr>
+              <a:t>": "2.11.1",</a:t>
+            </a:r>
+          </a:p>
+          <a:p>
+            <a:pPr marL="91440" indent="0">
+              <a:lnSpc>
+                <a:spcPct val="114999"/>
+              </a:lnSpc>
+              <a:buFont typeface="Open Sans"/>
+              <a:buNone/>
+            </a:pPr>
+            <a:r>
+              <a:rPr lang="en-US" sz="1200" b="1" dirty="0">
+                <a:solidFill>
+                  <a:schemeClr val="bg1"/>
+                </a:solidFill>
+                <a:latin typeface="Courier New"/>
+                <a:cs typeface="Courier New"/>
+              </a:rPr>
+              <a:t>  "</a:t>
+            </a:r>
+            <a:r>
+              <a:rPr lang="en-US" sz="1200" b="1" dirty="0" err="1">
+                <a:solidFill>
+                  <a:schemeClr val="bg1"/>
+                </a:solidFill>
+                <a:latin typeface="Courier New"/>
+                <a:cs typeface="Courier New"/>
+              </a:rPr>
+              <a:t>isf.run_id</a:t>
+            </a:r>
+            <a:r>
+              <a:rPr lang="en-US" sz="1200" b="1" dirty="0">
+                <a:solidFill>
+                  <a:schemeClr val="bg1"/>
+                </a:solidFill>
+                <a:latin typeface="Courier New"/>
+                <a:cs typeface="Courier New"/>
+              </a:rPr>
+              <a:t>": "64t-6vw",</a:t>
+            </a:r>
+          </a:p>
+          <a:p>
+            <a:pPr marL="91440" indent="0">
+              <a:lnSpc>
+                <a:spcPct val="114999"/>
+              </a:lnSpc>
+              <a:buFont typeface="Open Sans"/>
+              <a:buNone/>
+            </a:pPr>
+            <a:r>
+              <a:rPr lang="en-US" sz="1200" b="1" dirty="0">
+                <a:solidFill>
+                  <a:schemeClr val="bg1"/>
+                </a:solidFill>
+                <a:latin typeface="Courier New"/>
+                <a:cs typeface="Courier New"/>
+              </a:rPr>
+              <a:t>  "</a:t>
+            </a:r>
+            <a:r>
+              <a:rPr lang="en-US" sz="1200" b="1" dirty="0" err="1">
+                <a:solidFill>
+                  <a:schemeClr val="bg1"/>
+                </a:solidFill>
+                <a:latin typeface="Courier New"/>
+                <a:cs typeface="Courier New"/>
+              </a:rPr>
+              <a:t>isf.is_hotfix</a:t>
+            </a:r>
+            <a:r>
+              <a:rPr lang="en-US" sz="1200" b="1" dirty="0">
+                <a:solidFill>
+                  <a:schemeClr val="bg1"/>
+                </a:solidFill>
+                <a:latin typeface="Courier New"/>
+                <a:cs typeface="Courier New"/>
+              </a:rPr>
+              <a:t>": "true",</a:t>
+            </a:r>
+          </a:p>
+          <a:p>
+            <a:pPr marL="91440" indent="0">
+              <a:lnSpc>
+                <a:spcPct val="114999"/>
+              </a:lnSpc>
+              <a:buFont typeface="Open Sans"/>
+              <a:buNone/>
+            </a:pPr>
+            <a:r>
+              <a:rPr lang="en-US" sz="1200" b="1" dirty="0">
+                <a:solidFill>
+                  <a:schemeClr val="bg1"/>
+                </a:solidFill>
+                <a:latin typeface="Courier New"/>
+                <a:cs typeface="Courier New"/>
+              </a:rPr>
+              <a:t>  "</a:t>
+            </a:r>
+            <a:r>
+              <a:rPr lang="en-US" sz="1200" b="1" dirty="0" err="1">
+                <a:solidFill>
+                  <a:schemeClr val="bg1"/>
+                </a:solidFill>
+                <a:latin typeface="Courier New"/>
+                <a:cs typeface="Courier New"/>
+              </a:rPr>
+              <a:t>isf.hotfix_reference</a:t>
+            </a:r>
+            <a:r>
+              <a:rPr lang="en-US" sz="1200" b="1" dirty="0">
+                <a:solidFill>
+                  <a:schemeClr val="bg1"/>
+                </a:solidFill>
+                <a:latin typeface="Courier New"/>
+                <a:cs typeface="Courier New"/>
+              </a:rPr>
+              <a:t>": "78219",</a:t>
+            </a:r>
+          </a:p>
+          <a:p>
+            <a:pPr marL="91440" indent="0">
+              <a:lnSpc>
+                <a:spcPct val="114999"/>
+              </a:lnSpc>
+              <a:buFont typeface="Open Sans"/>
+              <a:buNone/>
+            </a:pPr>
+            <a:r>
+              <a:rPr lang="en-US" sz="1200" b="1" dirty="0">
+                <a:solidFill>
+                  <a:schemeClr val="bg1"/>
+                </a:solidFill>
+                <a:latin typeface="Courier New"/>
+                <a:cs typeface="Courier New"/>
+              </a:rPr>
+              <a:t>  "</a:t>
+            </a:r>
+            <a:r>
+              <a:rPr lang="en-US" sz="1200" b="1" dirty="0" err="1">
+                <a:solidFill>
+                  <a:schemeClr val="bg1"/>
+                </a:solidFill>
+                <a:latin typeface="Courier New"/>
+                <a:cs typeface="Courier New"/>
+              </a:rPr>
+              <a:t>isf.internal</a:t>
+            </a:r>
+            <a:r>
+              <a:rPr lang="en-US" sz="1200" b="1" dirty="0">
+                <a:solidFill>
+                  <a:schemeClr val="bg1"/>
+                </a:solidFill>
+                <a:latin typeface="Courier New"/>
+                <a:cs typeface="Courier New"/>
+              </a:rPr>
+              <a:t>": "true",</a:t>
+            </a:r>
+            <a:endParaRPr lang="en-US" sz="1200" dirty="0">
+              <a:solidFill>
+                <a:schemeClr val="bg1"/>
+              </a:solidFill>
+              <a:latin typeface="Courier New"/>
+              <a:cs typeface="Courier New"/>
+            </a:endParaRPr>
+          </a:p>
+          <a:p>
+            <a:pPr marL="91440" indent="0">
+              <a:lnSpc>
+                <a:spcPct val="114999"/>
+              </a:lnSpc>
+              <a:buFont typeface="Open Sans"/>
+              <a:buNone/>
+            </a:pPr>
+            <a:r>
+              <a:rPr lang="en-US" sz="1200" b="1" dirty="0">
+                <a:solidFill>
+                  <a:schemeClr val="bg1"/>
+                </a:solidFill>
+                <a:latin typeface="Courier New"/>
+                <a:cs typeface="Courier New"/>
+              </a:rPr>
+              <a:t>  "</a:t>
+            </a:r>
+            <a:r>
+              <a:rPr lang="en-US" sz="1200" b="1" dirty="0" err="1">
+                <a:solidFill>
+                  <a:schemeClr val="bg1"/>
+                </a:solidFill>
+                <a:latin typeface="Courier New"/>
+                <a:cs typeface="Courier New"/>
+              </a:rPr>
+              <a:t>isf.backup_service</a:t>
+            </a:r>
+            <a:r>
+              <a:rPr lang="en-US" sz="1200" b="1" dirty="0">
+                <a:solidFill>
+                  <a:schemeClr val="bg1"/>
+                </a:solidFill>
+                <a:latin typeface="Courier New"/>
+                <a:cs typeface="Courier New"/>
+              </a:rPr>
+              <a:t>": "v15.5”</a:t>
+            </a:r>
+            <a:endParaRPr lang="en-US" sz="1200" dirty="0">
+              <a:solidFill>
+                <a:schemeClr val="bg1"/>
+              </a:solidFill>
+              <a:latin typeface="Courier New"/>
+              <a:cs typeface="Courier New"/>
+            </a:endParaRPr>
+          </a:p>
+          <a:p>
+            <a:pPr marL="91440" indent="0">
+              <a:lnSpc>
+                <a:spcPct val="114999"/>
+              </a:lnSpc>
+              <a:buFont typeface="Open Sans"/>
+              <a:buNone/>
+            </a:pPr>
+            <a:r>
+              <a:rPr lang="en-US" sz="1200" b="1" dirty="0">
+                <a:solidFill>
+                  <a:schemeClr val="bg1"/>
+                </a:solidFill>
+                <a:latin typeface="Courier New"/>
+                <a:cs typeface="Courier New"/>
+              </a:rPr>
+              <a:t>  ...</a:t>
+            </a:r>
+            <a:endParaRPr lang="en-US" sz="1200" dirty="0">
+              <a:solidFill>
+                <a:schemeClr val="bg1"/>
+              </a:solidFill>
+              <a:latin typeface="Courier New"/>
+              <a:cs typeface="Courier New"/>
+            </a:endParaRPr>
+          </a:p>
+          <a:p>
+            <a:pPr marL="91440" indent="0">
+              <a:lnSpc>
+                <a:spcPct val="114999"/>
+              </a:lnSpc>
+              <a:buFont typeface="Open Sans"/>
+              <a:buNone/>
+            </a:pPr>
+            <a:r>
+              <a:rPr lang="en-US" sz="1200" b="1" dirty="0">
+                <a:solidFill>
+                  <a:schemeClr val="bg1"/>
+                </a:solidFill>
+                <a:latin typeface="Courier New"/>
+                <a:cs typeface="Courier New"/>
+              </a:rPr>
+              <a:t>}</a:t>
+            </a:r>
+            <a:endParaRPr lang="en-US" sz="1200">
+              <a:solidFill>
+                <a:schemeClr val="bg1"/>
+              </a:solidFill>
+            </a:endParaRPr>
           </a:p>
         </p:txBody>
       </p:sp>
     </p:spTree>
     <p:extLst>
       <p:ext uri="{BB962C8B-B14F-4D97-AF65-F5344CB8AC3E}">
-        <p14:creationId xmlns:p14="http://schemas.microsoft.com/office/powerpoint/2010/main" val="683496415"/>
+        <p14:creationId xmlns:p14="http://schemas.microsoft.com/office/powerpoint/2010/main" val="1650872000"/>
       </p:ext>
     </p:extLst>
   </p:cSld>
@@ -7108,7 +9406,7 @@
 </p:sld>
 </file>
 
-<file path=ppt/slides/slide5.xml><?xml version="1.0" encoding="utf-8"?>
+<file path=ppt/slides/slide6.xml><?xml version="1.0" encoding="utf-8"?>
 <p:sld xmlns:a="http://schemas.openxmlformats.org/drawingml/2006/main" xmlns:r="http://schemas.openxmlformats.org/officeDocument/2006/relationships" xmlns:p="http://schemas.openxmlformats.org/presentationml/2006/main">
   <p:cSld>
     <p:spTree>
@@ -7250,6 +9548,36 @@
           </a:p>
         </p:txBody>
       </p:sp>
+      <p:pic>
+        <p:nvPicPr>
+          <p:cNvPr id="3" name="Picture 2">
+            <a:extLst>
+              <a:ext uri="{FF2B5EF4-FFF2-40B4-BE49-F238E27FC236}">
+                <a16:creationId xmlns:a16="http://schemas.microsoft.com/office/drawing/2014/main" id="{B5B11B99-46FB-6538-2C3A-A3A9675C5595}"/>
+              </a:ext>
+            </a:extLst>
+          </p:cNvPr>
+          <p:cNvPicPr>
+            <a:picLocks noChangeAspect="1"/>
+          </p:cNvPicPr>
+          <p:nvPr/>
+        </p:nvPicPr>
+        <p:blipFill>
+          <a:blip r:embed="rId3"/>
+          <a:stretch>
+            <a:fillRect/>
+          </a:stretch>
+        </p:blipFill>
+        <p:spPr>
+          <a:xfrm>
+            <a:off x="8290152" y="4520972"/>
+            <a:ext cx="540885" cy="540885"/>
+          </a:xfrm>
+          <a:prstGeom prst="rect">
+            <a:avLst/>
+          </a:prstGeom>
+        </p:spPr>
+      </p:pic>
     </p:spTree>
     <p:extLst>
       <p:ext uri="{BB962C8B-B14F-4D97-AF65-F5344CB8AC3E}">
@@ -7263,7 +9591,7 @@
 </p:sld>
 </file>
 
-<file path=ppt/slides/slide6.xml><?xml version="1.0" encoding="utf-8"?>
+<file path=ppt/slides/slide7.xml><?xml version="1.0" encoding="utf-8"?>
 <p:sld xmlns:a="http://schemas.openxmlformats.org/drawingml/2006/main" xmlns:r="http://schemas.openxmlformats.org/officeDocument/2006/relationships" xmlns:p="http://schemas.openxmlformats.org/presentationml/2006/main">
   <p:cSld>
     <p:spTree>
@@ -7367,7 +9695,7 @@
             <a:pPr marL="514350" indent="-285750"/>
             <a:r>
               <a:rPr lang="en-US" sz="1600" dirty="0"/>
-              <a:t>If the artifacts you build support adding and querying metadata, use it!</a:t>
+              <a:t>Take advantage of your artifacts that support adding and querying metadata</a:t>
             </a:r>
           </a:p>
           <a:p>
@@ -7395,7 +9723,29 @@
             <a:pPr marL="514350" indent="-285750"/>
             <a:r>
               <a:rPr lang="en-US" sz="1600" dirty="0"/>
-              <a:t>Make it easy to add and query metadata for your artifacts</a:t>
+              <a:t>Make it easy to add metadata to your artifacts to speed adoption</a:t>
+            </a:r>
+          </a:p>
+          <a:p>
+            <a:pPr marL="514350" indent="-285750">
+              <a:lnSpc>
+                <a:spcPct val="114999"/>
+              </a:lnSpc>
+            </a:pPr>
+            <a:r>
+              <a:rPr lang="en-US" sz="1600" dirty="0"/>
+              <a:t>Expose enough data for your needs, but not so much that it's a security concern </a:t>
+            </a:r>
+          </a:p>
+          <a:p>
+            <a:pPr marL="514350" indent="-285750">
+              <a:lnSpc>
+                <a:spcPct val="114999"/>
+              </a:lnSpc>
+            </a:pPr>
+            <a:r>
+              <a:rPr lang="en-US" sz="1600" dirty="0"/>
+              <a:t>Make it easy to query metadata so other teams can benefit</a:t>
             </a:r>
           </a:p>
           <a:p>
@@ -7404,6 +9754,36 @@
           </a:p>
         </p:txBody>
       </p:sp>
+      <p:pic>
+        <p:nvPicPr>
+          <p:cNvPr id="3" name="Picture 2">
+            <a:extLst>
+              <a:ext uri="{FF2B5EF4-FFF2-40B4-BE49-F238E27FC236}">
+                <a16:creationId xmlns:a16="http://schemas.microsoft.com/office/drawing/2014/main" id="{DDE6AA8D-A575-4574-03B6-9A447FD29FA2}"/>
+              </a:ext>
+            </a:extLst>
+          </p:cNvPr>
+          <p:cNvPicPr>
+            <a:picLocks noChangeAspect="1"/>
+          </p:cNvPicPr>
+          <p:nvPr/>
+        </p:nvPicPr>
+        <p:blipFill>
+          <a:blip r:embed="rId3"/>
+          <a:stretch>
+            <a:fillRect/>
+          </a:stretch>
+        </p:blipFill>
+        <p:spPr>
+          <a:xfrm>
+            <a:off x="8290152" y="4520972"/>
+            <a:ext cx="540885" cy="540885"/>
+          </a:xfrm>
+          <a:prstGeom prst="rect">
+            <a:avLst/>
+          </a:prstGeom>
+        </p:spPr>
+      </p:pic>
     </p:spTree>
     <p:extLst>
       <p:ext uri="{BB962C8B-B14F-4D97-AF65-F5344CB8AC3E}">
@@ -7417,7 +9797,7 @@
 </p:sld>
 </file>
 
-<file path=ppt/slides/slide7.xml><?xml version="1.0" encoding="utf-8"?>
+<file path=ppt/slides/slide8.xml><?xml version="1.0" encoding="utf-8"?>
 <p:sld xmlns:a="http://schemas.openxmlformats.org/drawingml/2006/main" xmlns:r="http://schemas.openxmlformats.org/officeDocument/2006/relationships" xmlns:p="http://schemas.openxmlformats.org/presentationml/2006/main">
   <p:cSld>
     <p:spTree>
@@ -7486,6 +9866,36 @@
           </a:p>
         </p:txBody>
       </p:sp>
+      <p:pic>
+        <p:nvPicPr>
+          <p:cNvPr id="3" name="Picture 2">
+            <a:extLst>
+              <a:ext uri="{FF2B5EF4-FFF2-40B4-BE49-F238E27FC236}">
+                <a16:creationId xmlns:a16="http://schemas.microsoft.com/office/drawing/2014/main" id="{BD87C00F-F191-7D40-AF85-A7543AD164B4}"/>
+              </a:ext>
+            </a:extLst>
+          </p:cNvPr>
+          <p:cNvPicPr>
+            <a:picLocks noChangeAspect="1"/>
+          </p:cNvPicPr>
+          <p:nvPr/>
+        </p:nvPicPr>
+        <p:blipFill>
+          <a:blip r:embed="rId3"/>
+          <a:stretch>
+            <a:fillRect/>
+          </a:stretch>
+        </p:blipFill>
+        <p:spPr>
+          <a:xfrm>
+            <a:off x="312964" y="4520972"/>
+            <a:ext cx="540885" cy="540885"/>
+          </a:xfrm>
+          <a:prstGeom prst="rect">
+            <a:avLst/>
+          </a:prstGeom>
+        </p:spPr>
+      </p:pic>
     </p:spTree>
     <p:extLst>
       <p:ext uri="{BB962C8B-B14F-4D97-AF65-F5344CB8AC3E}">

--- a/open-source-summit-na-2026/Artifacts-Metadata-OSS-NA26.pptx
+++ b/open-source-summit-na-2026/Artifacts-Metadata-OSS-NA26.pptx
@@ -1419,7 +1419,7 @@
               <a:buSzPts val="1100"/>
               <a:buNone/>
             </a:pPr>
-            <a:endParaRPr/>
+            <a:endParaRPr dirty="0"/>
           </a:p>
         </p:txBody>
       </p:sp>
@@ -1541,7 +1541,7 @@
               <a:buSzPts val="1100"/>
               <a:buNone/>
             </a:pPr>
-            <a:endParaRPr/>
+            <a:endParaRPr dirty="0"/>
           </a:p>
         </p:txBody>
       </p:sp>
@@ -1663,7 +1663,7 @@
               <a:buSzPts val="1100"/>
               <a:buNone/>
             </a:pPr>
-            <a:endParaRPr/>
+            <a:endParaRPr dirty="0"/>
           </a:p>
         </p:txBody>
       </p:sp>
@@ -2093,7 +2093,7 @@
               <a:buSzPts val="1100"/>
               <a:buNone/>
             </a:pPr>
-            <a:endParaRPr/>
+            <a:endParaRPr dirty="0"/>
           </a:p>
         </p:txBody>
       </p:sp>
@@ -2238,7 +2238,7 @@
               <a:buSzPts val="1100"/>
               <a:buNone/>
             </a:pPr>
-            <a:endParaRPr/>
+            <a:endParaRPr dirty="0"/>
           </a:p>
         </p:txBody>
       </p:sp>
@@ -6714,19 +6714,15 @@
           <a:p>
             <a:pPr marL="514350" indent="-285750"/>
             <a:r>
-              <a:rPr lang="en-US" sz="1600" dirty="0" err="1"/>
-              <a:t>Openshift</a:t>
-            </a:r>
-            <a:r>
               <a:rPr lang="en-US" sz="1600" dirty="0"/>
-              <a:t> product with 40+ separate repos each with their own build</a:t>
+              <a:t>Over 40+ separate repos each with their own build</a:t>
             </a:r>
           </a:p>
           <a:p>
             <a:pPr marL="514350" indent="-285750"/>
             <a:r>
               <a:rPr lang="en-US" sz="1600" dirty="0"/>
-              <a:t>Our product is fully-</a:t>
+              <a:t>Fully </a:t>
             </a:r>
             <a:r>
               <a:rPr lang="en-US" sz="1600" dirty="0" err="1"/>
@@ -6734,7 +6730,14 @@
             </a:r>
             <a:r>
               <a:rPr lang="en-US" sz="1600" dirty="0"/>
-              <a:t>, so all image references are by digest and not tag</a:t>
+              <a:t> – All images references use digests and not tag</a:t>
+            </a:r>
+          </a:p>
+          <a:p>
+            <a:pPr marL="514350" indent="-285750"/>
+            <a:r>
+              <a:rPr lang="en-US" sz="1600" dirty="0"/>
+              <a:t>Makes it difficult for team to really know what’s been built or installed</a:t>
             </a:r>
           </a:p>
           <a:p>
@@ -6745,7 +6748,7 @@
             </a:pPr>
             <a:r>
               <a:rPr lang="en-US" sz="1600" dirty="0"/>
-              <a:t>Lots of data to track for each built artifact</a:t>
+              <a:t>Developers want to know ”Is our code in this image?” </a:t>
             </a:r>
           </a:p>
           <a:p>
@@ -6756,51 +6759,8 @@
             </a:pPr>
             <a:r>
               <a:rPr lang="en-US" sz="1600" dirty="0"/>
-              <a:t>Common Questions</a:t>
+              <a:t>Testers want to know ”Which build is installed on the system?”</a:t>
             </a:r>
-            <a:endParaRPr lang="en-US" sz="1600" dirty="0">
-              <a:solidFill>
-                <a:srgbClr val="000000"/>
-              </a:solidFill>
-            </a:endParaRPr>
-          </a:p>
-          <a:p>
-            <a:pPr lvl="1">
-              <a:lnSpc>
-                <a:spcPct val="114999"/>
-              </a:lnSpc>
-              <a:buSzPts val="1800"/>
-            </a:pPr>
-            <a:r>
-              <a:rPr lang="en-US" sz="1600" dirty="0"/>
-              <a:t>”Is our code in the build?” </a:t>
-            </a:r>
-          </a:p>
-          <a:p>
-            <a:pPr lvl="1">
-              <a:lnSpc>
-                <a:spcPct val="114999"/>
-              </a:lnSpc>
-            </a:pPr>
-            <a:r>
-              <a:rPr lang="en-US" sz="1600" dirty="0"/>
-              <a:t>”What build is installed on the system?”</a:t>
-            </a:r>
-          </a:p>
-          <a:p>
-            <a:pPr lvl="1">
-              <a:lnSpc>
-                <a:spcPct val="114999"/>
-              </a:lnSpc>
-            </a:pPr>
-            <a:r>
-              <a:rPr lang="en-US" sz="1600" dirty="0"/>
-              <a:t>“Where's the build log?”</a:t>
-            </a:r>
-          </a:p>
-          <a:p>
-            <a:pPr marL="514350" indent="-285750"/>
-            <a:endParaRPr lang="en-US" sz="1600" dirty="0"/>
           </a:p>
         </p:txBody>
       </p:sp>
@@ -6931,7 +6891,14 @@
             </a:pPr>
             <a:r>
               <a:rPr lang="en-US" sz="1600" dirty="0"/>
-              <a:t>Early approaches worked but required DevOps expertise</a:t>
+              <a:t>Tracked metadata in a Git repo</a:t>
+            </a:r>
+            <a:br>
+              <a:rPr lang="en-US" sz="1600" dirty="0"/>
+            </a:br>
+            <a:r>
+              <a:rPr lang="en-US" sz="1600" dirty="0"/>
+              <a:t>but cumbersome for non-DevOps</a:t>
             </a:r>
             <a:endParaRPr lang="en-US" sz="1600" dirty="0">
               <a:solidFill>
@@ -6947,9 +6914,20 @@
             </a:pPr>
             <a:r>
               <a:rPr lang="en-US" sz="1600" dirty="0"/>
-              <a:t>Adding metadata to container labels sped up lookups</a:t>
+              <a:t>Adding metadata to container labels is more accessible</a:t>
             </a:r>
-            <a:endParaRPr lang="en-US" sz="1600">
+          </a:p>
+          <a:p>
+            <a:pPr marL="514350" indent="-285750">
+              <a:lnSpc>
+                <a:spcPct val="114999"/>
+              </a:lnSpc>
+            </a:pPr>
+            <a:r>
+              <a:rPr lang="en-US" sz="1600" dirty="0"/>
+              <a:t>Used a prefix to quickly filter for our labels</a:t>
+            </a:r>
+            <a:endParaRPr lang="en-US" sz="1600" dirty="0">
               <a:solidFill>
                 <a:srgbClr val="000000"/>
               </a:solidFill>
@@ -6963,19 +6941,7 @@
             </a:pPr>
             <a:r>
               <a:rPr lang="en-US" sz="1600" dirty="0"/>
-              <a:t>Anyone could inspect images with digest to get the metadata</a:t>
-            </a:r>
-            <a:endParaRPr lang="en-US"/>
-          </a:p>
-          <a:p>
-            <a:pPr marL="514350" indent="-285750">
-              <a:lnSpc>
-                <a:spcPct val="114999"/>
-              </a:lnSpc>
-            </a:pPr>
-            <a:r>
-              <a:rPr lang="en-US" sz="1600" dirty="0"/>
-              <a:t>Used a prefix to quickly filter for our labels</a:t>
+              <a:t>Anyone could inspect images with digest to get the metadata – doesn’t require a running system</a:t>
             </a:r>
             <a:endParaRPr lang="en-US" dirty="0"/>
           </a:p>
@@ -7003,7 +6969,7 @@
         <p:spPr>
           <a:xfrm>
             <a:off x="4832400" y="1152475"/>
-            <a:ext cx="3904649" cy="2354695"/>
+            <a:ext cx="3904649" cy="2688005"/>
           </a:xfrm>
           <a:prstGeom prst="rect">
             <a:avLst/>
@@ -7178,7 +7144,7 @@
                 <a:latin typeface="Courier New"/>
                 <a:cs typeface="Courier New"/>
               </a:rPr>
-              <a:t>isf.run_id</a:t>
+              <a:t>isf.build_run</a:t>
             </a:r>
             <a:r>
               <a:rPr lang="en-US" sz="1200" b="1" dirty="0">
@@ -7347,7 +7313,45 @@
                 <a:latin typeface="Courier New"/>
                 <a:cs typeface="Courier New"/>
               </a:rPr>
-              <a:t>": "v15.5”</a:t>
+              <a:t>": "v11.0.0",</a:t>
+            </a:r>
+          </a:p>
+          <a:p>
+            <a:pPr marL="91440" indent="0">
+              <a:lnSpc>
+                <a:spcPct val="114999"/>
+              </a:lnSpc>
+              <a:buNone/>
+            </a:pPr>
+            <a:r>
+              <a:rPr lang="en-US" sz="1200" b="1" dirty="0">
+                <a:solidFill>
+                  <a:schemeClr val="bg1"/>
+                </a:solidFill>
+                <a:latin typeface="Courier New"/>
+                <a:cs typeface="Courier New"/>
+              </a:rPr>
+              <a:t>  "</a:t>
+            </a:r>
+            <a:r>
+              <a:rPr lang="en-US" sz="1200" b="1" dirty="0" err="1">
+                <a:solidFill>
+                  <a:schemeClr val="bg1"/>
+                </a:solidFill>
+                <a:latin typeface="Courier New"/>
+                <a:cs typeface="Courier New"/>
+              </a:rPr>
+              <a:t>isf.storage_service</a:t>
+            </a:r>
+            <a:r>
+              <a:rPr lang="en-US" sz="1200" b="1" dirty="0">
+                <a:solidFill>
+                  <a:schemeClr val="bg1"/>
+                </a:solidFill>
+                <a:latin typeface="Courier New"/>
+                <a:cs typeface="Courier New"/>
+              </a:rPr>
+              <a:t>": "v5.5.1"</a:t>
             </a:r>
             <a:endParaRPr lang="en-US" sz="1200" dirty="0">
               <a:solidFill>
@@ -7399,7 +7403,7 @@
               </a:rPr>
               <a:t>}</a:t>
             </a:r>
-            <a:endParaRPr sz="1200">
+            <a:endParaRPr sz="1200" dirty="0">
               <a:solidFill>
                 <a:schemeClr val="bg1"/>
               </a:solidFill>
@@ -8634,7 +8638,19 @@
             </a:r>
             <a:r>
               <a:rPr lang="en-US" sz="1600" dirty="0"/>
-              <a:t> orchestration.  Some examples:</a:t>
+              <a:t> orchestration.</a:t>
+            </a:r>
+          </a:p>
+          <a:p>
+            <a:pPr marL="228600" indent="0">
+              <a:lnSpc>
+                <a:spcPct val="114999"/>
+              </a:lnSpc>
+              <a:buNone/>
+            </a:pPr>
+            <a:r>
+              <a:rPr lang="en-US" sz="1600" dirty="0"/>
+              <a:t>Some examples:</a:t>
             </a:r>
             <a:endParaRPr lang="en-US" sz="1600" dirty="0">
               <a:solidFill>
@@ -8715,684 +8731,36 @@
           </a:prstGeom>
         </p:spPr>
       </p:pic>
-      <p:sp>
-        <p:nvSpPr>
-          <p:cNvPr id="6" name="Google Shape;62;p4">
+      <p:pic>
+        <p:nvPicPr>
+          <p:cNvPr id="2" name="Picture 1">
             <a:extLst>
               <a:ext uri="{FF2B5EF4-FFF2-40B4-BE49-F238E27FC236}">
-                <a16:creationId xmlns:a16="http://schemas.microsoft.com/office/drawing/2014/main" id="{F9CE0D61-48EC-BCC9-E751-C99DE9DCDFF4}"/>
+                <a16:creationId xmlns:a16="http://schemas.microsoft.com/office/drawing/2014/main" id="{0C86F7B8-0EE1-E22E-5A56-B4624BF43891}"/>
               </a:ext>
             </a:extLst>
           </p:cNvPr>
-          <p:cNvSpPr txBox="1">
-            <a:spLocks/>
-          </p:cNvSpPr>
+          <p:cNvPicPr>
+            <a:picLocks noChangeAspect="1"/>
+          </p:cNvPicPr>
           <p:nvPr/>
-        </p:nvSpPr>
+        </p:nvPicPr>
+        <p:blipFill>
+          <a:blip r:embed="rId4"/>
+          <a:stretch>
+            <a:fillRect/>
+          </a:stretch>
+        </p:blipFill>
         <p:spPr>
           <a:xfrm>
-            <a:off x="4832400" y="1152475"/>
-            <a:ext cx="3904649" cy="2354695"/>
+            <a:off x="4829534" y="1152475"/>
+            <a:ext cx="3731060" cy="2632229"/>
           </a:xfrm>
           <a:prstGeom prst="rect">
             <a:avLst/>
           </a:prstGeom>
-          <a:solidFill>
-            <a:schemeClr val="tx1"/>
-          </a:solidFill>
-          <a:ln>
-            <a:noFill/>
-          </a:ln>
         </p:spPr>
-        <p:txBody>
-          <a:bodyPr spcFirstLastPara="1" wrap="square" lIns="91425" tIns="91425" rIns="91425" bIns="91425" anchor="t" anchorCtr="0">
-            <a:normAutofit lnSpcReduction="10000"/>
-          </a:bodyPr>
-          <a:lstStyle>
-            <a:defPPr marR="0" lvl="0" algn="l" rtl="0">
-              <a:lnSpc>
-                <a:spcPct val="100000"/>
-              </a:lnSpc>
-              <a:spcBef>
-                <a:spcPts val="0"/>
-              </a:spcBef>
-              <a:spcAft>
-                <a:spcPts val="0"/>
-              </a:spcAft>
-            </a:defPPr>
-            <a:lvl1pPr marL="457200" marR="0" lvl="0" indent="-317500" algn="l" rtl="0">
-              <a:lnSpc>
-                <a:spcPct val="115000"/>
-              </a:lnSpc>
-              <a:spcBef>
-                <a:spcPts val="0"/>
-              </a:spcBef>
-              <a:spcAft>
-                <a:spcPts val="0"/>
-              </a:spcAft>
-              <a:buClr>
-                <a:srgbClr val="2F4858"/>
-              </a:buClr>
-              <a:buSzPts val="1400"/>
-              <a:buFont typeface="Open Sans"/>
-              <a:buChar char="●"/>
-              <a:defRPr sz="1400" b="0" i="0" u="none" strike="noStrike" cap="none">
-                <a:solidFill>
-                  <a:srgbClr val="2F4858"/>
-                </a:solidFill>
-                <a:latin typeface="Open Sans"/>
-                <a:ea typeface="Open Sans"/>
-                <a:cs typeface="Open Sans"/>
-                <a:sym typeface="Open Sans"/>
-              </a:defRPr>
-            </a:lvl1pPr>
-            <a:lvl2pPr marL="914400" marR="0" lvl="1" indent="-304800" algn="l" rtl="0">
-              <a:lnSpc>
-                <a:spcPct val="115000"/>
-              </a:lnSpc>
-              <a:spcBef>
-                <a:spcPts val="0"/>
-              </a:spcBef>
-              <a:spcAft>
-                <a:spcPts val="0"/>
-              </a:spcAft>
-              <a:buClr>
-                <a:srgbClr val="2F4858"/>
-              </a:buClr>
-              <a:buSzPts val="1200"/>
-              <a:buFont typeface="Open Sans"/>
-              <a:buChar char="○"/>
-              <a:defRPr sz="1200" b="0" i="0" u="none" strike="noStrike" cap="none">
-                <a:solidFill>
-                  <a:srgbClr val="2F4858"/>
-                </a:solidFill>
-                <a:latin typeface="Open Sans"/>
-                <a:ea typeface="Open Sans"/>
-                <a:cs typeface="Open Sans"/>
-                <a:sym typeface="Open Sans"/>
-              </a:defRPr>
-            </a:lvl2pPr>
-            <a:lvl3pPr marL="1371600" marR="0" lvl="2" indent="-304800" algn="l" rtl="0">
-              <a:lnSpc>
-                <a:spcPct val="115000"/>
-              </a:lnSpc>
-              <a:spcBef>
-                <a:spcPts val="0"/>
-              </a:spcBef>
-              <a:spcAft>
-                <a:spcPts val="0"/>
-              </a:spcAft>
-              <a:buClr>
-                <a:srgbClr val="2F4858"/>
-              </a:buClr>
-              <a:buSzPts val="1200"/>
-              <a:buFont typeface="Open Sans"/>
-              <a:buChar char="■"/>
-              <a:defRPr sz="1200" b="0" i="0" u="none" strike="noStrike" cap="none">
-                <a:solidFill>
-                  <a:srgbClr val="2F4858"/>
-                </a:solidFill>
-                <a:latin typeface="Open Sans"/>
-                <a:ea typeface="Open Sans"/>
-                <a:cs typeface="Open Sans"/>
-                <a:sym typeface="Open Sans"/>
-              </a:defRPr>
-            </a:lvl3pPr>
-            <a:lvl4pPr marL="1828800" marR="0" lvl="3" indent="-304800" algn="l" rtl="0">
-              <a:lnSpc>
-                <a:spcPct val="115000"/>
-              </a:lnSpc>
-              <a:spcBef>
-                <a:spcPts val="0"/>
-              </a:spcBef>
-              <a:spcAft>
-                <a:spcPts val="0"/>
-              </a:spcAft>
-              <a:buClr>
-                <a:srgbClr val="2F4858"/>
-              </a:buClr>
-              <a:buSzPts val="1200"/>
-              <a:buFont typeface="Open Sans"/>
-              <a:buChar char="●"/>
-              <a:defRPr sz="1200" b="0" i="0" u="none" strike="noStrike" cap="none">
-                <a:solidFill>
-                  <a:srgbClr val="2F4858"/>
-                </a:solidFill>
-                <a:latin typeface="Open Sans"/>
-                <a:ea typeface="Open Sans"/>
-                <a:cs typeface="Open Sans"/>
-                <a:sym typeface="Open Sans"/>
-              </a:defRPr>
-            </a:lvl4pPr>
-            <a:lvl5pPr marL="2286000" marR="0" lvl="4" indent="-304800" algn="l" rtl="0">
-              <a:lnSpc>
-                <a:spcPct val="115000"/>
-              </a:lnSpc>
-              <a:spcBef>
-                <a:spcPts val="0"/>
-              </a:spcBef>
-              <a:spcAft>
-                <a:spcPts val="0"/>
-              </a:spcAft>
-              <a:buClr>
-                <a:srgbClr val="2F4858"/>
-              </a:buClr>
-              <a:buSzPts val="1200"/>
-              <a:buFont typeface="Open Sans"/>
-              <a:buChar char="○"/>
-              <a:defRPr sz="1200" b="0" i="0" u="none" strike="noStrike" cap="none">
-                <a:solidFill>
-                  <a:srgbClr val="2F4858"/>
-                </a:solidFill>
-                <a:latin typeface="Open Sans"/>
-                <a:ea typeface="Open Sans"/>
-                <a:cs typeface="Open Sans"/>
-                <a:sym typeface="Open Sans"/>
-              </a:defRPr>
-            </a:lvl5pPr>
-            <a:lvl6pPr marL="2743200" marR="0" lvl="5" indent="-304800" algn="l" rtl="0">
-              <a:lnSpc>
-                <a:spcPct val="115000"/>
-              </a:lnSpc>
-              <a:spcBef>
-                <a:spcPts val="0"/>
-              </a:spcBef>
-              <a:spcAft>
-                <a:spcPts val="0"/>
-              </a:spcAft>
-              <a:buClr>
-                <a:srgbClr val="2F4858"/>
-              </a:buClr>
-              <a:buSzPts val="1200"/>
-              <a:buFont typeface="Open Sans"/>
-              <a:buChar char="■"/>
-              <a:defRPr sz="1200" b="0" i="0" u="none" strike="noStrike" cap="none">
-                <a:solidFill>
-                  <a:srgbClr val="2F4858"/>
-                </a:solidFill>
-                <a:latin typeface="Open Sans"/>
-                <a:ea typeface="Open Sans"/>
-                <a:cs typeface="Open Sans"/>
-                <a:sym typeface="Open Sans"/>
-              </a:defRPr>
-            </a:lvl6pPr>
-            <a:lvl7pPr marL="3200400" marR="0" lvl="6" indent="-304800" algn="l" rtl="0">
-              <a:lnSpc>
-                <a:spcPct val="115000"/>
-              </a:lnSpc>
-              <a:spcBef>
-                <a:spcPts val="0"/>
-              </a:spcBef>
-              <a:spcAft>
-                <a:spcPts val="0"/>
-              </a:spcAft>
-              <a:buClr>
-                <a:srgbClr val="2F4858"/>
-              </a:buClr>
-              <a:buSzPts val="1200"/>
-              <a:buFont typeface="Open Sans"/>
-              <a:buChar char="●"/>
-              <a:defRPr sz="1200" b="0" i="0" u="none" strike="noStrike" cap="none">
-                <a:solidFill>
-                  <a:srgbClr val="2F4858"/>
-                </a:solidFill>
-                <a:latin typeface="Open Sans"/>
-                <a:ea typeface="Open Sans"/>
-                <a:cs typeface="Open Sans"/>
-                <a:sym typeface="Open Sans"/>
-              </a:defRPr>
-            </a:lvl7pPr>
-            <a:lvl8pPr marL="3657600" marR="0" lvl="7" indent="-304800" algn="l" rtl="0">
-              <a:lnSpc>
-                <a:spcPct val="115000"/>
-              </a:lnSpc>
-              <a:spcBef>
-                <a:spcPts val="0"/>
-              </a:spcBef>
-              <a:spcAft>
-                <a:spcPts val="0"/>
-              </a:spcAft>
-              <a:buClr>
-                <a:srgbClr val="2F4858"/>
-              </a:buClr>
-              <a:buSzPts val="1200"/>
-              <a:buFont typeface="Open Sans"/>
-              <a:buChar char="○"/>
-              <a:defRPr sz="1200" b="0" i="0" u="none" strike="noStrike" cap="none">
-                <a:solidFill>
-                  <a:srgbClr val="2F4858"/>
-                </a:solidFill>
-                <a:latin typeface="Open Sans"/>
-                <a:ea typeface="Open Sans"/>
-                <a:cs typeface="Open Sans"/>
-                <a:sym typeface="Open Sans"/>
-              </a:defRPr>
-            </a:lvl8pPr>
-            <a:lvl9pPr marL="4114800" marR="0" lvl="8" indent="-304800" algn="l" rtl="0">
-              <a:lnSpc>
-                <a:spcPct val="115000"/>
-              </a:lnSpc>
-              <a:spcBef>
-                <a:spcPts val="0"/>
-              </a:spcBef>
-              <a:spcAft>
-                <a:spcPts val="0"/>
-              </a:spcAft>
-              <a:buClr>
-                <a:srgbClr val="2F4858"/>
-              </a:buClr>
-              <a:buSzPts val="1200"/>
-              <a:buFont typeface="Open Sans"/>
-              <a:buChar char="■"/>
-              <a:defRPr sz="1200" b="0" i="0" u="none" strike="noStrike" cap="none">
-                <a:solidFill>
-                  <a:srgbClr val="2F4858"/>
-                </a:solidFill>
-                <a:latin typeface="Open Sans"/>
-                <a:ea typeface="Open Sans"/>
-                <a:cs typeface="Open Sans"/>
-                <a:sym typeface="Open Sans"/>
-              </a:defRPr>
-            </a:lvl9pPr>
-          </a:lstStyle>
-          <a:p>
-            <a:pPr marL="91440" indent="0">
-              <a:lnSpc>
-                <a:spcPct val="114999"/>
-              </a:lnSpc>
-              <a:buFont typeface="Open Sans"/>
-              <a:buNone/>
-            </a:pPr>
-            <a:r>
-              <a:rPr lang="en-US" sz="1200" b="1" dirty="0">
-                <a:solidFill>
-                  <a:schemeClr val="bg1"/>
-                </a:solidFill>
-                <a:latin typeface="Courier New"/>
-                <a:cs typeface="Courier New"/>
-              </a:rPr>
-              <a:t>{</a:t>
-            </a:r>
-            <a:endParaRPr lang="en-US" sz="1200" dirty="0">
-              <a:solidFill>
-                <a:schemeClr val="bg1"/>
-              </a:solidFill>
-              <a:latin typeface="Courier New"/>
-              <a:cs typeface="Courier New"/>
-            </a:endParaRPr>
-          </a:p>
-          <a:p>
-            <a:pPr marL="91440" indent="0">
-              <a:lnSpc>
-                <a:spcPct val="114999"/>
-              </a:lnSpc>
-              <a:buFont typeface="Open Sans"/>
-              <a:buNone/>
-            </a:pPr>
-            <a:r>
-              <a:rPr lang="en-US" sz="1200" b="1" dirty="0">
-                <a:solidFill>
-                  <a:schemeClr val="bg1"/>
-                </a:solidFill>
-                <a:latin typeface="Courier New"/>
-                <a:cs typeface="Courier New"/>
-              </a:rPr>
-              <a:t>  ...</a:t>
-            </a:r>
-            <a:endParaRPr lang="en-US" sz="1200" dirty="0">
-              <a:solidFill>
-                <a:schemeClr val="bg1"/>
-              </a:solidFill>
-              <a:latin typeface="Courier New"/>
-              <a:cs typeface="Courier New"/>
-            </a:endParaRPr>
-          </a:p>
-          <a:p>
-            <a:pPr marL="91440" indent="0">
-              <a:lnSpc>
-                <a:spcPct val="114999"/>
-              </a:lnSpc>
-              <a:buFont typeface="Open Sans"/>
-              <a:buNone/>
-            </a:pPr>
-            <a:r>
-              <a:rPr lang="en-US" sz="1200" b="1" dirty="0">
-                <a:solidFill>
-                  <a:schemeClr val="bg1"/>
-                </a:solidFill>
-                <a:latin typeface="Courier New"/>
-                <a:cs typeface="Courier New"/>
-              </a:rPr>
-              <a:t>  "</a:t>
-            </a:r>
-            <a:r>
-              <a:rPr lang="en-US" sz="1200" b="1" dirty="0" err="1">
-                <a:solidFill>
-                  <a:schemeClr val="bg1"/>
-                </a:solidFill>
-                <a:latin typeface="Courier New"/>
-                <a:cs typeface="Courier New"/>
-              </a:rPr>
-              <a:t>isf.git_commit</a:t>
-            </a:r>
-            <a:r>
-              <a:rPr lang="en-US" sz="1200" b="1" dirty="0">
-                <a:solidFill>
-                  <a:schemeClr val="bg1"/>
-                </a:solidFill>
-                <a:latin typeface="Courier New"/>
-                <a:cs typeface="Courier New"/>
-              </a:rPr>
-              <a:t>": "3a97fb6",</a:t>
-            </a:r>
-            <a:endParaRPr lang="en-US" sz="1200" dirty="0">
-              <a:solidFill>
-                <a:schemeClr val="bg1"/>
-              </a:solidFill>
-              <a:latin typeface="Courier New"/>
-              <a:cs typeface="Courier New"/>
-            </a:endParaRPr>
-          </a:p>
-          <a:p>
-            <a:pPr marL="91440" indent="0">
-              <a:lnSpc>
-                <a:spcPct val="114999"/>
-              </a:lnSpc>
-              <a:buFont typeface="Open Sans"/>
-              <a:buNone/>
-            </a:pPr>
-            <a:r>
-              <a:rPr lang="en-US" sz="1200" b="1" dirty="0">
-                <a:solidFill>
-                  <a:schemeClr val="bg1"/>
-                </a:solidFill>
-                <a:latin typeface="Courier New"/>
-                <a:cs typeface="Courier New"/>
-              </a:rPr>
-              <a:t>  "</a:t>
-            </a:r>
-            <a:r>
-              <a:rPr lang="en-US" sz="1200" b="1" dirty="0" err="1">
-                <a:solidFill>
-                  <a:schemeClr val="bg1"/>
-                </a:solidFill>
-                <a:latin typeface="Courier New"/>
-                <a:cs typeface="Courier New"/>
-              </a:rPr>
-              <a:t>isf.version</a:t>
-            </a:r>
-            <a:r>
-              <a:rPr lang="en-US" sz="1200" b="1" dirty="0">
-                <a:solidFill>
-                  <a:schemeClr val="bg1"/>
-                </a:solidFill>
-                <a:latin typeface="Courier New"/>
-                <a:cs typeface="Courier New"/>
-              </a:rPr>
-              <a:t>": "2.11.1",</a:t>
-            </a:r>
-          </a:p>
-          <a:p>
-            <a:pPr marL="91440" indent="0">
-              <a:lnSpc>
-                <a:spcPct val="114999"/>
-              </a:lnSpc>
-              <a:buFont typeface="Open Sans"/>
-              <a:buNone/>
-            </a:pPr>
-            <a:r>
-              <a:rPr lang="en-US" sz="1200" b="1" dirty="0">
-                <a:solidFill>
-                  <a:schemeClr val="bg1"/>
-                </a:solidFill>
-                <a:latin typeface="Courier New"/>
-                <a:cs typeface="Courier New"/>
-              </a:rPr>
-              <a:t>  "</a:t>
-            </a:r>
-            <a:r>
-              <a:rPr lang="en-US" sz="1200" b="1" dirty="0" err="1">
-                <a:solidFill>
-                  <a:schemeClr val="bg1"/>
-                </a:solidFill>
-                <a:latin typeface="Courier New"/>
-                <a:cs typeface="Courier New"/>
-              </a:rPr>
-              <a:t>isf.run_id</a:t>
-            </a:r>
-            <a:r>
-              <a:rPr lang="en-US" sz="1200" b="1" dirty="0">
-                <a:solidFill>
-                  <a:schemeClr val="bg1"/>
-                </a:solidFill>
-                <a:latin typeface="Courier New"/>
-                <a:cs typeface="Courier New"/>
-              </a:rPr>
-              <a:t>": "64t-6vw",</a:t>
-            </a:r>
-          </a:p>
-          <a:p>
-            <a:pPr marL="91440" indent="0">
-              <a:lnSpc>
-                <a:spcPct val="114999"/>
-              </a:lnSpc>
-              <a:buFont typeface="Open Sans"/>
-              <a:buNone/>
-            </a:pPr>
-            <a:r>
-              <a:rPr lang="en-US" sz="1200" b="1" dirty="0">
-                <a:solidFill>
-                  <a:schemeClr val="bg1"/>
-                </a:solidFill>
-                <a:latin typeface="Courier New"/>
-                <a:cs typeface="Courier New"/>
-              </a:rPr>
-              <a:t>  "</a:t>
-            </a:r>
-            <a:r>
-              <a:rPr lang="en-US" sz="1200" b="1" dirty="0" err="1">
-                <a:solidFill>
-                  <a:schemeClr val="bg1"/>
-                </a:solidFill>
-                <a:latin typeface="Courier New"/>
-                <a:cs typeface="Courier New"/>
-              </a:rPr>
-              <a:t>isf.is_hotfix</a:t>
-            </a:r>
-            <a:r>
-              <a:rPr lang="en-US" sz="1200" b="1" dirty="0">
-                <a:solidFill>
-                  <a:schemeClr val="bg1"/>
-                </a:solidFill>
-                <a:latin typeface="Courier New"/>
-                <a:cs typeface="Courier New"/>
-              </a:rPr>
-              <a:t>": "true",</a:t>
-            </a:r>
-          </a:p>
-          <a:p>
-            <a:pPr marL="91440" indent="0">
-              <a:lnSpc>
-                <a:spcPct val="114999"/>
-              </a:lnSpc>
-              <a:buFont typeface="Open Sans"/>
-              <a:buNone/>
-            </a:pPr>
-            <a:r>
-              <a:rPr lang="en-US" sz="1200" b="1" dirty="0">
-                <a:solidFill>
-                  <a:schemeClr val="bg1"/>
-                </a:solidFill>
-                <a:latin typeface="Courier New"/>
-                <a:cs typeface="Courier New"/>
-              </a:rPr>
-              <a:t>  "</a:t>
-            </a:r>
-            <a:r>
-              <a:rPr lang="en-US" sz="1200" b="1" dirty="0" err="1">
-                <a:solidFill>
-                  <a:schemeClr val="bg1"/>
-                </a:solidFill>
-                <a:latin typeface="Courier New"/>
-                <a:cs typeface="Courier New"/>
-              </a:rPr>
-              <a:t>isf.hotfix_reference</a:t>
-            </a:r>
-            <a:r>
-              <a:rPr lang="en-US" sz="1200" b="1" dirty="0">
-                <a:solidFill>
-                  <a:schemeClr val="bg1"/>
-                </a:solidFill>
-                <a:latin typeface="Courier New"/>
-                <a:cs typeface="Courier New"/>
-              </a:rPr>
-              <a:t>": "78219",</a:t>
-            </a:r>
-          </a:p>
-          <a:p>
-            <a:pPr marL="91440" indent="0">
-              <a:lnSpc>
-                <a:spcPct val="114999"/>
-              </a:lnSpc>
-              <a:buFont typeface="Open Sans"/>
-              <a:buNone/>
-            </a:pPr>
-            <a:r>
-              <a:rPr lang="en-US" sz="1200" b="1" dirty="0">
-                <a:solidFill>
-                  <a:schemeClr val="bg1"/>
-                </a:solidFill>
-                <a:latin typeface="Courier New"/>
-                <a:cs typeface="Courier New"/>
-              </a:rPr>
-              <a:t>  "</a:t>
-            </a:r>
-            <a:r>
-              <a:rPr lang="en-US" sz="1200" b="1" dirty="0" err="1">
-                <a:solidFill>
-                  <a:schemeClr val="bg1"/>
-                </a:solidFill>
-                <a:latin typeface="Courier New"/>
-                <a:cs typeface="Courier New"/>
-              </a:rPr>
-              <a:t>isf.internal</a:t>
-            </a:r>
-            <a:r>
-              <a:rPr lang="en-US" sz="1200" b="1" dirty="0">
-                <a:solidFill>
-                  <a:schemeClr val="bg1"/>
-                </a:solidFill>
-                <a:latin typeface="Courier New"/>
-                <a:cs typeface="Courier New"/>
-              </a:rPr>
-              <a:t>": "true",</a:t>
-            </a:r>
-            <a:endParaRPr lang="en-US" sz="1200" dirty="0">
-              <a:solidFill>
-                <a:schemeClr val="bg1"/>
-              </a:solidFill>
-              <a:latin typeface="Courier New"/>
-              <a:cs typeface="Courier New"/>
-            </a:endParaRPr>
-          </a:p>
-          <a:p>
-            <a:pPr marL="91440" indent="0">
-              <a:lnSpc>
-                <a:spcPct val="114999"/>
-              </a:lnSpc>
-              <a:buFont typeface="Open Sans"/>
-              <a:buNone/>
-            </a:pPr>
-            <a:r>
-              <a:rPr lang="en-US" sz="1200" b="1" dirty="0">
-                <a:solidFill>
-                  <a:schemeClr val="bg1"/>
-                </a:solidFill>
-                <a:latin typeface="Courier New"/>
-                <a:cs typeface="Courier New"/>
-              </a:rPr>
-              <a:t>  "</a:t>
-            </a:r>
-            <a:r>
-              <a:rPr lang="en-US" sz="1200" b="1" dirty="0" err="1">
-                <a:solidFill>
-                  <a:schemeClr val="bg1"/>
-                </a:solidFill>
-                <a:latin typeface="Courier New"/>
-                <a:cs typeface="Courier New"/>
-              </a:rPr>
-              <a:t>isf.backup_service</a:t>
-            </a:r>
-            <a:r>
-              <a:rPr lang="en-US" sz="1200" b="1" dirty="0">
-                <a:solidFill>
-                  <a:schemeClr val="bg1"/>
-                </a:solidFill>
-                <a:latin typeface="Courier New"/>
-                <a:cs typeface="Courier New"/>
-              </a:rPr>
-              <a:t>": "v15.5”</a:t>
-            </a:r>
-            <a:endParaRPr lang="en-US" sz="1200" dirty="0">
-              <a:solidFill>
-                <a:schemeClr val="bg1"/>
-              </a:solidFill>
-              <a:latin typeface="Courier New"/>
-              <a:cs typeface="Courier New"/>
-            </a:endParaRPr>
-          </a:p>
-          <a:p>
-            <a:pPr marL="91440" indent="0">
-              <a:lnSpc>
-                <a:spcPct val="114999"/>
-              </a:lnSpc>
-              <a:buFont typeface="Open Sans"/>
-              <a:buNone/>
-            </a:pPr>
-            <a:r>
-              <a:rPr lang="en-US" sz="1200" b="1" dirty="0">
-                <a:solidFill>
-                  <a:schemeClr val="bg1"/>
-                </a:solidFill>
-                <a:latin typeface="Courier New"/>
-                <a:cs typeface="Courier New"/>
-              </a:rPr>
-              <a:t>  ...</a:t>
-            </a:r>
-            <a:endParaRPr lang="en-US" sz="1200" dirty="0">
-              <a:solidFill>
-                <a:schemeClr val="bg1"/>
-              </a:solidFill>
-              <a:latin typeface="Courier New"/>
-              <a:cs typeface="Courier New"/>
-            </a:endParaRPr>
-          </a:p>
-          <a:p>
-            <a:pPr marL="91440" indent="0">
-              <a:lnSpc>
-                <a:spcPct val="114999"/>
-              </a:lnSpc>
-              <a:buFont typeface="Open Sans"/>
-              <a:buNone/>
-            </a:pPr>
-            <a:r>
-              <a:rPr lang="en-US" sz="1200" b="1" dirty="0">
-                <a:solidFill>
-                  <a:schemeClr val="bg1"/>
-                </a:solidFill>
-                <a:latin typeface="Courier New"/>
-                <a:cs typeface="Courier New"/>
-              </a:rPr>
-              <a:t>}</a:t>
-            </a:r>
-            <a:endParaRPr lang="en-US" sz="1200">
-              <a:solidFill>
-                <a:schemeClr val="bg1"/>
-              </a:solidFill>
-            </a:endParaRPr>
-          </a:p>
-        </p:txBody>
-      </p:sp>
+      </p:pic>
     </p:spTree>
     <p:extLst>
       <p:ext uri="{BB962C8B-B14F-4D97-AF65-F5344CB8AC3E}">
@@ -9518,7 +8886,7 @@
             <a:pPr marL="514350" indent="-285750"/>
             <a:r>
               <a:rPr lang="en-US" sz="1600" dirty="0"/>
-              <a:t>Our security scanning pipelines automatically create CVE Git issues with a lot of audit data (including our container labels)</a:t>
+              <a:t>Our security scanning pipelines automatically create CVE Git issues with a lot of audit data, including our container labels</a:t>
             </a:r>
           </a:p>
           <a:p>
@@ -9532,7 +8900,7 @@
             <a:pPr marL="514350" indent="-285750"/>
             <a:r>
               <a:rPr lang="en-US" sz="1600" dirty="0"/>
-              <a:t>Security team identified all “hotfix” images on their own for their own needs</a:t>
+              <a:t>Dashboard has ”hotfix” filter to get list of all hotfix images published</a:t>
             </a:r>
           </a:p>
           <a:p>
@@ -9543,7 +8911,7 @@
             </a:pPr>
             <a:r>
               <a:rPr lang="en-US" sz="1600" dirty="0"/>
-              <a:t>Especially useful in this AI era where data is being handed over in bulk to AI tools for analysis</a:t>
+              <a:t>Especially useful in this AI era where data is passed to AI tools for processing and analysis</a:t>
             </a:r>
           </a:p>
         </p:txBody>
@@ -9709,7 +9077,7 @@
             <a:pPr marL="514350" indent="-285750"/>
             <a:r>
               <a:rPr lang="en-US" sz="1600" dirty="0"/>
-              <a:t>Consider what data is intrinsic to your artifacts – what remains true even after the artifact is built</a:t>
+              <a:t>Consider what data is intrinsic to your artifacts</a:t>
             </a:r>
           </a:p>
           <a:p>
@@ -9723,7 +9091,7 @@
             <a:pPr marL="514350" indent="-285750"/>
             <a:r>
               <a:rPr lang="en-US" sz="1600" dirty="0"/>
-              <a:t>Make it easy to add metadata to your artifacts to speed adoption</a:t>
+              <a:t>Make it easy to add and query metadata to your artifacts to speed adoption</a:t>
             </a:r>
           </a:p>
           <a:p>
@@ -9736,21 +9104,6 @@
               <a:rPr lang="en-US" sz="1600" dirty="0"/>
               <a:t>Expose enough data for your needs, but not so much that it's a security concern </a:t>
             </a:r>
-          </a:p>
-          <a:p>
-            <a:pPr marL="514350" indent="-285750">
-              <a:lnSpc>
-                <a:spcPct val="114999"/>
-              </a:lnSpc>
-            </a:pPr>
-            <a:r>
-              <a:rPr lang="en-US" sz="1600" dirty="0"/>
-              <a:t>Make it easy to query metadata so other teams can benefit</a:t>
-            </a:r>
-          </a:p>
-          <a:p>
-            <a:pPr marL="514350" indent="-285750"/>
-            <a:endParaRPr lang="en-US" sz="1600" dirty="0"/>
           </a:p>
         </p:txBody>
       </p:sp>
